--- a/documentation/🌍Eugene_life_story_website_sample.pptx
+++ b/documentation/🌍Eugene_life_story_website_sample.pptx
@@ -6,9 +6,11 @@
   </p:sldMasterIdLst>
   <p:sldIdLst>
     <p:sldId id="256" r:id="rId2"/>
-    <p:sldId id="257" r:id="rId3"/>
-    <p:sldId id="258" r:id="rId4"/>
-    <p:sldId id="259" r:id="rId5"/>
+    <p:sldId id="260" r:id="rId3"/>
+    <p:sldId id="261" r:id="rId4"/>
+    <p:sldId id="257" r:id="rId5"/>
+    <p:sldId id="258" r:id="rId6"/>
+    <p:sldId id="259" r:id="rId7"/>
   </p:sldIdLst>
   <p:sldSz cx="12192000" cy="6858000"/>
   <p:notesSz cx="6858000" cy="9144000"/>
@@ -312,7 +314,7 @@
           <a:p>
             <a:fld id="{00AFC816-D61A-4F5D-88B8-4E6F6AD20135}" type="datetimeFigureOut">
               <a:rPr lang="en-US" smtClean="0"/>
-              <a:t>6/19/2025</a:t>
+              <a:t>7/5/2025</a:t>
             </a:fld>
             <a:endParaRPr lang="en-US"/>
           </a:p>
@@ -587,7 +589,7 @@
           <a:p>
             <a:fld id="{00AFC816-D61A-4F5D-88B8-4E6F6AD20135}" type="datetimeFigureOut">
               <a:rPr lang="en-US" smtClean="0"/>
-              <a:t>6/19/2025</a:t>
+              <a:t>7/5/2025</a:t>
             </a:fld>
             <a:endParaRPr lang="en-US"/>
           </a:p>
@@ -781,7 +783,7 @@
           <a:p>
             <a:fld id="{00AFC816-D61A-4F5D-88B8-4E6F6AD20135}" type="datetimeFigureOut">
               <a:rPr lang="en-US" smtClean="0"/>
-              <a:t>6/19/2025</a:t>
+              <a:t>7/5/2025</a:t>
             </a:fld>
             <a:endParaRPr lang="en-US"/>
           </a:p>
@@ -1054,7 +1056,7 @@
           <a:p>
             <a:fld id="{00AFC816-D61A-4F5D-88B8-4E6F6AD20135}" type="datetimeFigureOut">
               <a:rPr lang="en-US" smtClean="0"/>
-              <a:t>6/19/2025</a:t>
+              <a:t>7/5/2025</a:t>
             </a:fld>
             <a:endParaRPr lang="en-US"/>
           </a:p>
@@ -1395,7 +1397,7 @@
           <a:p>
             <a:fld id="{00AFC816-D61A-4F5D-88B8-4E6F6AD20135}" type="datetimeFigureOut">
               <a:rPr lang="en-US" smtClean="0"/>
-              <a:t>6/19/2025</a:t>
+              <a:t>7/5/2025</a:t>
             </a:fld>
             <a:endParaRPr lang="en-US"/>
           </a:p>
@@ -2018,7 +2020,7 @@
           <a:p>
             <a:fld id="{00AFC816-D61A-4F5D-88B8-4E6F6AD20135}" type="datetimeFigureOut">
               <a:rPr lang="en-US" smtClean="0"/>
-              <a:t>6/19/2025</a:t>
+              <a:t>7/5/2025</a:t>
             </a:fld>
             <a:endParaRPr lang="en-US"/>
           </a:p>
@@ -2878,7 +2880,7 @@
           <a:p>
             <a:fld id="{00AFC816-D61A-4F5D-88B8-4E6F6AD20135}" type="datetimeFigureOut">
               <a:rPr lang="en-US" smtClean="0"/>
-              <a:t>6/19/2025</a:t>
+              <a:t>7/5/2025</a:t>
             </a:fld>
             <a:endParaRPr lang="en-US"/>
           </a:p>
@@ -3048,7 +3050,7 @@
           <a:p>
             <a:fld id="{00AFC816-D61A-4F5D-88B8-4E6F6AD20135}" type="datetimeFigureOut">
               <a:rPr lang="en-US" smtClean="0"/>
-              <a:t>6/19/2025</a:t>
+              <a:t>7/5/2025</a:t>
             </a:fld>
             <a:endParaRPr lang="en-US"/>
           </a:p>
@@ -3228,7 +3230,7 @@
           <a:p>
             <a:fld id="{00AFC816-D61A-4F5D-88B8-4E6F6AD20135}" type="datetimeFigureOut">
               <a:rPr lang="en-US" smtClean="0"/>
-              <a:t>6/19/2025</a:t>
+              <a:t>7/5/2025</a:t>
             </a:fld>
             <a:endParaRPr lang="en-US"/>
           </a:p>
@@ -3398,7 +3400,7 @@
           <a:p>
             <a:fld id="{00AFC816-D61A-4F5D-88B8-4E6F6AD20135}" type="datetimeFigureOut">
               <a:rPr lang="en-US" smtClean="0"/>
-              <a:t>6/19/2025</a:t>
+              <a:t>7/5/2025</a:t>
             </a:fld>
             <a:endParaRPr lang="en-US"/>
           </a:p>
@@ -3645,7 +3647,7 @@
           <a:p>
             <a:fld id="{00AFC816-D61A-4F5D-88B8-4E6F6AD20135}" type="datetimeFigureOut">
               <a:rPr lang="en-US" smtClean="0"/>
-              <a:t>6/19/2025</a:t>
+              <a:t>7/5/2025</a:t>
             </a:fld>
             <a:endParaRPr lang="en-US"/>
           </a:p>
@@ -3937,7 +3939,7 @@
           <a:p>
             <a:fld id="{00AFC816-D61A-4F5D-88B8-4E6F6AD20135}" type="datetimeFigureOut">
               <a:rPr lang="en-US" smtClean="0"/>
-              <a:t>6/19/2025</a:t>
+              <a:t>7/5/2025</a:t>
             </a:fld>
             <a:endParaRPr lang="en-US"/>
           </a:p>
@@ -4381,7 +4383,7 @@
           <a:p>
             <a:fld id="{00AFC816-D61A-4F5D-88B8-4E6F6AD20135}" type="datetimeFigureOut">
               <a:rPr lang="en-US" smtClean="0"/>
-              <a:t>6/19/2025</a:t>
+              <a:t>7/5/2025</a:t>
             </a:fld>
             <a:endParaRPr lang="en-US"/>
           </a:p>
@@ -4499,7 +4501,7 @@
           <a:p>
             <a:fld id="{00AFC816-D61A-4F5D-88B8-4E6F6AD20135}" type="datetimeFigureOut">
               <a:rPr lang="en-US" smtClean="0"/>
-              <a:t>6/19/2025</a:t>
+              <a:t>7/5/2025</a:t>
             </a:fld>
             <a:endParaRPr lang="en-US"/>
           </a:p>
@@ -4594,7 +4596,7 @@
           <a:p>
             <a:fld id="{00AFC816-D61A-4F5D-88B8-4E6F6AD20135}" type="datetimeFigureOut">
               <a:rPr lang="en-US" smtClean="0"/>
-              <a:t>6/19/2025</a:t>
+              <a:t>7/5/2025</a:t>
             </a:fld>
             <a:endParaRPr lang="en-US"/>
           </a:p>
@@ -4873,7 +4875,7 @@
           <a:p>
             <a:fld id="{00AFC816-D61A-4F5D-88B8-4E6F6AD20135}" type="datetimeFigureOut">
               <a:rPr lang="en-US" smtClean="0"/>
-              <a:t>6/19/2025</a:t>
+              <a:t>7/5/2025</a:t>
             </a:fld>
             <a:endParaRPr lang="en-US"/>
           </a:p>
@@ -5148,7 +5150,7 @@
           <a:p>
             <a:fld id="{00AFC816-D61A-4F5D-88B8-4E6F6AD20135}" type="datetimeFigureOut">
               <a:rPr lang="en-US" smtClean="0"/>
-              <a:t>6/19/2025</a:t>
+              <a:t>7/5/2025</a:t>
             </a:fld>
             <a:endParaRPr lang="en-US"/>
           </a:p>
@@ -5577,7 +5579,7 @@
           <a:p>
             <a:fld id="{00AFC816-D61A-4F5D-88B8-4E6F6AD20135}" type="datetimeFigureOut">
               <a:rPr lang="en-US" smtClean="0"/>
-              <a:t>6/19/2025</a:t>
+              <a:t>7/5/2025</a:t>
             </a:fld>
             <a:endParaRPr lang="en-US"/>
           </a:p>
@@ -6131,28 +6133,20 @@
             </a:r>
             <a:r>
               <a:rPr lang="en-US" sz="4800" b="1" dirty="0" smtClean="0"/>
-              <a:t>Website</a:t>
-            </a:r>
-            <a:r>
+              <a:t>Website?</a:t>
+            </a:r>
+            <a:br>
               <a:rPr lang="en-US" sz="4800" b="1" dirty="0" smtClean="0"/>
-              <a:t>?</a:t>
-            </a:r>
-            <a:r>
-              <a:rPr lang="en-US" sz="4800" b="1" smtClean="0"/>
+            </a:br>
+            <a:r>
+              <a:rPr lang="en-US" sz="4800" b="1" dirty="0" smtClean="0"/>
               <a:t/>
             </a:r>
             <a:br>
-              <a:rPr lang="en-US" sz="4800" b="1" smtClean="0"/>
+              <a:rPr lang="en-US" sz="4800" b="1" dirty="0" smtClean="0"/>
             </a:br>
             <a:r>
-              <a:rPr lang="en-US" sz="4800" b="1" smtClean="0"/>
-              <a:t/>
-            </a:r>
-            <a:br>
-              <a:rPr lang="en-US" sz="4800" b="1" smtClean="0"/>
-            </a:br>
-            <a:r>
-              <a:rPr lang="en-US" sz="2000" b="1" smtClean="0">
+              <a:rPr lang="en-US" sz="2400" b="1" dirty="0" smtClean="0">
                 <a:solidFill>
                   <a:schemeClr val="accent5">
                     <a:lumMod val="60000"/>
@@ -6160,10 +6154,10 @@
                   </a:schemeClr>
                 </a:solidFill>
               </a:rPr>
-              <a:t>By</a:t>
-            </a:r>
-            <a:r>
-              <a:rPr lang="en-US" sz="2000" b="1" dirty="0" smtClean="0">
+              <a:t>By </a:t>
+            </a:r>
+            <a:r>
+              <a:rPr lang="en-US" sz="2400" b="1" dirty="0" smtClean="0">
                 <a:solidFill>
                   <a:schemeClr val="accent5">
                     <a:lumMod val="60000"/>
@@ -6171,10 +6165,10 @@
                   </a:schemeClr>
                 </a:solidFill>
               </a:rPr>
-              <a:t>, Eugene </a:t>
-            </a:r>
-            <a:r>
-              <a:rPr lang="en-US" sz="2000" b="1" dirty="0" err="1" smtClean="0">
+              <a:t>Eugene </a:t>
+            </a:r>
+            <a:r>
+              <a:rPr lang="en-US" sz="2400" b="1" dirty="0" err="1" smtClean="0">
                 <a:solidFill>
                   <a:schemeClr val="accent5">
                     <a:lumMod val="60000"/>
@@ -6358,7 +6352,7 @@
         </p:nvSpPr>
         <p:spPr>
           <a:xfrm>
-            <a:off x="1787533" y="927738"/>
+            <a:off x="109082" y="191461"/>
             <a:ext cx="9404723" cy="1400530"/>
           </a:xfrm>
         </p:spPr>
@@ -6367,21 +6361,13 @@
           <a:lstStyle/>
           <a:p>
             <a:r>
-              <a:rPr lang="en-US" sz="4800" b="1" dirty="0"/>
-              <a:t>💻 About This </a:t>
-            </a:r>
-            <a:r>
-              <a:rPr lang="en-US" sz="4800" b="1" dirty="0" smtClean="0"/>
-              <a:t>Sample Website</a:t>
-            </a:r>
-            <a:r>
-              <a:rPr lang="en-US" sz="4800" dirty="0"/>
-              <a:t/>
+              <a:rPr lang="en-US" sz="3200" b="1" dirty="0"/>
+              <a:t>Tip: Preserve Your Memories the Smart Way</a:t>
             </a:r>
             <a:br>
-              <a:rPr lang="en-US" sz="4800" dirty="0"/>
+              <a:rPr lang="en-US" sz="3200" b="1" dirty="0"/>
             </a:br>
-            <a:endParaRPr lang="en-US" sz="4800" dirty="0"/>
+            <a:endParaRPr lang="en-US" sz="3200" dirty="0"/>
           </a:p>
         </p:txBody>
       </p:sp>
@@ -6397,55 +6383,142 @@
         </p:nvSpPr>
         <p:spPr>
           <a:xfrm>
-            <a:off x="485057" y="2530778"/>
-            <a:ext cx="8946541" cy="3423138"/>
+            <a:off x="1291997" y="1293159"/>
+            <a:ext cx="8946541" cy="5296327"/>
           </a:xfrm>
         </p:spPr>
         <p:txBody>
           <a:bodyPr>
-            <a:normAutofit fontScale="92500" lnSpcReduction="10000"/>
+            <a:normAutofit fontScale="92500" lnSpcReduction="20000"/>
           </a:bodyPr>
           <a:lstStyle/>
           <a:p>
             <a:r>
-              <a:rPr lang="en-US" sz="3600" dirty="0"/>
-              <a:t>This life story </a:t>
-            </a:r>
-            <a:r>
-              <a:rPr lang="en-US" sz="3600" dirty="0" smtClean="0"/>
-              <a:t>website of mine </a:t>
-            </a:r>
-            <a:r>
-              <a:rPr lang="en-US" sz="3600" dirty="0"/>
-              <a:t>you’re seeing was built just for fun and as a sample</a:t>
-            </a:r>
-            <a:r>
-              <a:rPr lang="en-US" sz="3600" dirty="0" smtClean="0"/>
+              <a:rPr lang="en-US" dirty="0"/>
+              <a:t>Why risk losing your precious photos to damage, aging, or misplacement in physical albums</a:t>
+            </a:r>
+            <a:r>
+              <a:rPr lang="en-US" dirty="0" smtClean="0"/>
+              <a:t>?</a:t>
+            </a:r>
+          </a:p>
+          <a:p>
+            <a:pPr marL="0" indent="0">
+              <a:buNone/>
+            </a:pPr>
+            <a:endParaRPr lang="en-US" dirty="0"/>
+          </a:p>
+          <a:p>
+            <a:r>
+              <a:rPr lang="en-US" dirty="0"/>
+              <a:t>Instead, </a:t>
+            </a:r>
+            <a:r>
+              <a:rPr lang="en-US" b="1" dirty="0"/>
+              <a:t>create your own life story website</a:t>
+            </a:r>
+            <a:r>
+              <a:rPr lang="en-US" dirty="0"/>
+              <a:t> — a secure, organized, and lasting digital home for your memories</a:t>
+            </a:r>
+            <a:r>
+              <a:rPr lang="en-US" dirty="0" smtClean="0"/>
               <a:t>.</a:t>
             </a:r>
           </a:p>
           <a:p>
-            <a:r>
-              <a:rPr lang="en-US" sz="3600" dirty="0"/>
+            <a:endParaRPr lang="en-US" dirty="0"/>
+          </a:p>
+          <a:p>
+            <a:pPr marL="0" indent="0">
+              <a:buNone/>
+            </a:pPr>
+            <a:r>
+              <a:rPr lang="en-US" sz="2800" b="1" dirty="0"/>
+              <a:t>✨ Take it a step further</a:t>
+            </a:r>
+            <a:r>
+              <a:rPr lang="en-US" sz="2800" b="1" dirty="0" smtClean="0"/>
+              <a:t>:</a:t>
+            </a:r>
+          </a:p>
+          <a:p>
+            <a:pPr marL="0" indent="0">
+              <a:buNone/>
+            </a:pPr>
+            <a:r>
+              <a:rPr lang="en-US" sz="2800" b="1" dirty="0"/>
               <a:t/>
             </a:r>
             <a:br>
-              <a:rPr lang="en-US" sz="3600" dirty="0"/>
+              <a:rPr lang="en-US" sz="2800" b="1" dirty="0"/>
             </a:br>
             <a:r>
-              <a:rPr lang="en-US" sz="3600" dirty="0"/>
-              <a:t>Imagine what I can build for you — together with my software development team 😊</a:t>
-            </a:r>
-          </a:p>
-          <a:p>
-            <a:endParaRPr lang="en-US" sz="3600" dirty="0"/>
+              <a:rPr lang="en-US" dirty="0"/>
+              <a:t>Print a </a:t>
+            </a:r>
+            <a:r>
+              <a:rPr lang="en-US" b="1" dirty="0"/>
+              <a:t>QR code linked to your website</a:t>
+            </a:r>
+            <a:r>
+              <a:rPr lang="en-US" dirty="0"/>
+              <a:t>, place it in an elegant frame, and hang it on the wall of your living room. This simple setup allows your friends, guests, and loved ones to easily access your life story with just a quick scan</a:t>
+            </a:r>
+            <a:r>
+              <a:rPr lang="en-US" dirty="0" smtClean="0"/>
+              <a:t>.</a:t>
+            </a:r>
+          </a:p>
+          <a:p>
+            <a:pPr marL="0" indent="0">
+              <a:buNone/>
+            </a:pPr>
+            <a:endParaRPr lang="en-US" dirty="0"/>
+          </a:p>
+          <a:p>
+            <a:r>
+              <a:rPr lang="en-US" dirty="0"/>
+              <a:t>Below is an example of a QR </a:t>
+            </a:r>
+            <a:r>
+              <a:rPr lang="en-US" dirty="0" smtClean="0"/>
+              <a:t>code of my life story website(</a:t>
+            </a:r>
+            <a:r>
+              <a:rPr lang="en-US" b="1" i="1" dirty="0" smtClean="0"/>
+              <a:t>SAMPLE WEBSITE</a:t>
+            </a:r>
+            <a:r>
+              <a:rPr lang="en-US" dirty="0" smtClean="0"/>
+              <a:t>) </a:t>
+            </a:r>
+            <a:r>
+              <a:rPr lang="en-US" dirty="0"/>
+              <a:t>displayed on a living room wall — </a:t>
+            </a:r>
+            <a:r>
+              <a:rPr lang="en-US" i="1" u="sng" dirty="0"/>
+              <a:t>a modern way to keep your story alive </a:t>
+            </a:r>
+            <a:r>
+              <a:rPr lang="en-US" i="1" u="sng" dirty="0" smtClean="0"/>
+              <a:t>and easily </a:t>
+            </a:r>
+            <a:r>
+              <a:rPr lang="en-US" i="1" u="sng" dirty="0"/>
+              <a:t>accessible.</a:t>
+            </a:r>
+          </a:p>
+          <a:p>
+            <a:endParaRPr lang="en-US" dirty="0"/>
           </a:p>
         </p:txBody>
       </p:sp>
     </p:spTree>
     <p:extLst>
       <p:ext uri="{BB962C8B-B14F-4D97-AF65-F5344CB8AC3E}">
-        <p14:creationId xmlns:p14="http://schemas.microsoft.com/office/powerpoint/2010/main" val="784289591"/>
+        <p14:creationId xmlns:p14="http://schemas.microsoft.com/office/powerpoint/2010/main" val="1899192229"/>
       </p:ext>
     </p:extLst>
   </p:cSld>
@@ -6491,7 +6564,7 @@
         </p:nvSpPr>
         <p:spPr>
           <a:xfrm>
-            <a:off x="3803839" y="367374"/>
+            <a:off x="979940" y="-700265"/>
             <a:ext cx="9404723" cy="1400530"/>
           </a:xfrm>
         </p:spPr>
@@ -6499,96 +6572,73 @@
           <a:bodyPr/>
           <a:lstStyle/>
           <a:p>
-            <a:r>
-              <a:rPr lang="en-US" sz="6000" b="1" dirty="0"/>
-              <a:t>🚀 What We </a:t>
-            </a:r>
-            <a:r>
-              <a:rPr lang="en-US" sz="6000" b="1" dirty="0" smtClean="0"/>
-              <a:t>Do:</a:t>
-            </a:r>
-            <a:r>
-              <a:rPr lang="en-US" sz="6000" dirty="0"/>
-              <a:t/>
-            </a:r>
-            <a:br>
-              <a:rPr lang="en-US" sz="6000" dirty="0"/>
-            </a:br>
-            <a:endParaRPr lang="en-US" sz="6000" dirty="0"/>
-          </a:p>
-        </p:txBody>
-      </p:sp>
-      <p:sp>
-        <p:nvSpPr>
-          <p:cNvPr id="3" name="Content Placeholder 2"/>
-          <p:cNvSpPr>
-            <a:spLocks noGrp="1"/>
-          </p:cNvSpPr>
+            <a:endParaRPr lang="en-US" dirty="0"/>
+          </a:p>
+        </p:txBody>
+      </p:sp>
+      <p:pic>
+        <p:nvPicPr>
+          <p:cNvPr id="4" name="Content Placeholder 3"/>
+          <p:cNvPicPr>
+            <a:picLocks noGrp="1" noChangeAspect="1"/>
+          </p:cNvPicPr>
           <p:nvPr>
             <p:ph idx="1"/>
           </p:nvPr>
-        </p:nvSpPr>
-        <p:spPr/>
-        <p:txBody>
-          <a:bodyPr>
-            <a:normAutofit/>
-          </a:bodyPr>
-          <a:lstStyle/>
-          <a:p>
-            <a:pPr lvl="0"/>
-            <a:r>
-              <a:rPr lang="en-US" sz="3200" dirty="0"/>
-              <a:t>Web Design &amp; </a:t>
-            </a:r>
-            <a:r>
-              <a:rPr lang="en-US" sz="3200" dirty="0" smtClean="0"/>
-              <a:t>Hosting</a:t>
-            </a:r>
-          </a:p>
-          <a:p>
-            <a:pPr lvl="0"/>
-            <a:endParaRPr lang="en-US" sz="3200" dirty="0"/>
-          </a:p>
-          <a:p>
-            <a:pPr lvl="0"/>
-            <a:r>
-              <a:rPr lang="en-US" sz="3200" dirty="0"/>
-              <a:t>Business Systems </a:t>
-            </a:r>
-            <a:r>
-              <a:rPr lang="en-US" sz="3200" dirty="0" smtClean="0"/>
-              <a:t>SOFTWARE Development</a:t>
-            </a:r>
-          </a:p>
-          <a:p>
-            <a:pPr lvl="0"/>
-            <a:endParaRPr lang="en-US" sz="3200" dirty="0"/>
-          </a:p>
-          <a:p>
-            <a:pPr lvl="0"/>
-            <a:r>
-              <a:rPr lang="en-US" sz="3200" dirty="0"/>
-              <a:t>Mobile App Software</a:t>
-            </a:r>
-          </a:p>
-          <a:p>
-            <a:pPr marL="0" indent="0">
-              <a:buNone/>
-            </a:pPr>
-            <a:r>
-              <a:rPr lang="en-US" sz="3200" dirty="0"/>
-              <a:t> </a:t>
-            </a:r>
-          </a:p>
-          <a:p>
-            <a:endParaRPr lang="en-US" sz="3200" dirty="0"/>
-          </a:p>
-        </p:txBody>
-      </p:sp>
+        </p:nvPicPr>
+        <p:blipFill>
+          <a:blip r:embed="rId2" cstate="print">
+            <a:extLst>
+              <a:ext uri="{28A0092B-C50C-407E-A947-70E740481C1C}">
+                <a14:useLocalDpi xmlns:a14="http://schemas.microsoft.com/office/drawing/2010/main" val="0"/>
+              </a:ext>
+            </a:extLst>
+          </a:blip>
+          <a:stretch>
+            <a:fillRect/>
+          </a:stretch>
+        </p:blipFill>
+        <p:spPr>
+          <a:xfrm>
+            <a:off x="2248553" y="76151"/>
+            <a:ext cx="7315199" cy="6698343"/>
+          </a:xfrm>
+        </p:spPr>
+      </p:pic>
+      <p:pic>
+        <p:nvPicPr>
+          <p:cNvPr id="5" name="Picture 4"/>
+          <p:cNvPicPr>
+            <a:picLocks noChangeAspect="1"/>
+          </p:cNvPicPr>
+          <p:nvPr/>
+        </p:nvPicPr>
+        <p:blipFill>
+          <a:blip r:embed="rId3" cstate="print">
+            <a:extLst>
+              <a:ext uri="{28A0092B-C50C-407E-A947-70E740481C1C}">
+                <a14:useLocalDpi xmlns:a14="http://schemas.microsoft.com/office/drawing/2010/main" val="0"/>
+              </a:ext>
+            </a:extLst>
+          </a:blip>
+          <a:stretch>
+            <a:fillRect/>
+          </a:stretch>
+        </p:blipFill>
+        <p:spPr>
+          <a:xfrm>
+            <a:off x="5413829" y="508000"/>
+            <a:ext cx="3744685" cy="2882900"/>
+          </a:xfrm>
+          <a:prstGeom prst="rect">
+            <a:avLst/>
+          </a:prstGeom>
+        </p:spPr>
+      </p:pic>
     </p:spTree>
     <p:extLst>
       <p:ext uri="{BB962C8B-B14F-4D97-AF65-F5344CB8AC3E}">
-        <p14:creationId xmlns:p14="http://schemas.microsoft.com/office/powerpoint/2010/main" val="12644166"/>
+        <p14:creationId xmlns:p14="http://schemas.microsoft.com/office/powerpoint/2010/main" val="852065019"/>
       </p:ext>
     </p:extLst>
   </p:cSld>
@@ -6634,6 +6684,329 @@
         </p:nvSpPr>
         <p:spPr>
           <a:xfrm>
+            <a:off x="1787533" y="927738"/>
+            <a:ext cx="9404723" cy="1400530"/>
+          </a:xfrm>
+        </p:spPr>
+        <p:txBody>
+          <a:bodyPr/>
+          <a:lstStyle/>
+          <a:p>
+            <a:r>
+              <a:rPr lang="en-US" sz="4800" b="1" dirty="0"/>
+              <a:t>💻 About This </a:t>
+            </a:r>
+            <a:r>
+              <a:rPr lang="en-US" sz="4800" b="1" dirty="0" smtClean="0"/>
+              <a:t>Sample Website</a:t>
+            </a:r>
+            <a:r>
+              <a:rPr lang="en-US" sz="4800" dirty="0"/>
+              <a:t/>
+            </a:r>
+            <a:br>
+              <a:rPr lang="en-US" sz="4800" dirty="0"/>
+            </a:br>
+            <a:endParaRPr lang="en-US" sz="4800" dirty="0"/>
+          </a:p>
+        </p:txBody>
+      </p:sp>
+      <p:sp>
+        <p:nvSpPr>
+          <p:cNvPr id="3" name="Content Placeholder 2"/>
+          <p:cNvSpPr>
+            <a:spLocks noGrp="1"/>
+          </p:cNvSpPr>
+          <p:nvPr>
+            <p:ph idx="1"/>
+          </p:nvPr>
+        </p:nvSpPr>
+        <p:spPr>
+          <a:xfrm>
+            <a:off x="485057" y="2530778"/>
+            <a:ext cx="8946541" cy="3423138"/>
+          </a:xfrm>
+        </p:spPr>
+        <p:txBody>
+          <a:bodyPr>
+            <a:normAutofit fontScale="77500" lnSpcReduction="20000"/>
+          </a:bodyPr>
+          <a:lstStyle/>
+          <a:p>
+            <a:r>
+              <a:rPr lang="en-US" sz="3600" dirty="0"/>
+              <a:t>This life story </a:t>
+            </a:r>
+            <a:r>
+              <a:rPr lang="en-US" sz="3600" dirty="0" smtClean="0"/>
+              <a:t>website of mine </a:t>
+            </a:r>
+            <a:r>
+              <a:rPr lang="en-US" sz="3600" dirty="0"/>
+              <a:t>you’re </a:t>
+            </a:r>
+            <a:r>
+              <a:rPr lang="en-US" sz="3600" dirty="0" smtClean="0"/>
+              <a:t>seeing </a:t>
+            </a:r>
+            <a:r>
+              <a:rPr lang="en-US" sz="3600" b="1" i="1" dirty="0" smtClean="0"/>
+              <a:t>(click the link on the bottom of the last page </a:t>
+            </a:r>
+            <a:r>
+              <a:rPr lang="en-US" sz="3600" b="1" i="1" smtClean="0"/>
+              <a:t>to visit </a:t>
+            </a:r>
+            <a:r>
+              <a:rPr lang="en-US" sz="3600" b="1" i="1" dirty="0" smtClean="0"/>
+              <a:t>)</a:t>
+            </a:r>
+            <a:r>
+              <a:rPr lang="en-US" sz="3600" dirty="0" smtClean="0"/>
+              <a:t> </a:t>
+            </a:r>
+            <a:r>
+              <a:rPr lang="en-US" sz="3600" dirty="0"/>
+              <a:t>was built just for fun and as a sample</a:t>
+            </a:r>
+            <a:r>
+              <a:rPr lang="en-US" sz="3600" dirty="0" smtClean="0"/>
+              <a:t>.</a:t>
+            </a:r>
+          </a:p>
+          <a:p>
+            <a:endParaRPr lang="en-US" sz="3600" dirty="0" smtClean="0"/>
+          </a:p>
+          <a:p>
+            <a:r>
+              <a:rPr lang="en-US" sz="3600" dirty="0"/>
+              <a:t>Imagine what I can build for you — together with my software development team </a:t>
+            </a:r>
+            <a:r>
+              <a:rPr lang="en-US" sz="3600" dirty="0" smtClean="0"/>
+              <a:t>😊</a:t>
+            </a:r>
+            <a:r>
+              <a:rPr lang="en-US" sz="3600" dirty="0"/>
+              <a:t/>
+            </a:r>
+            <a:br>
+              <a:rPr lang="en-US" sz="3600" dirty="0"/>
+            </a:br>
+            <a:endParaRPr lang="en-US" sz="3600" dirty="0"/>
+          </a:p>
+        </p:txBody>
+      </p:sp>
+    </p:spTree>
+    <p:extLst>
+      <p:ext uri="{BB962C8B-B14F-4D97-AF65-F5344CB8AC3E}">
+        <p14:creationId xmlns:p14="http://schemas.microsoft.com/office/powerpoint/2010/main" val="784289591"/>
+      </p:ext>
+    </p:extLst>
+  </p:cSld>
+  <p:clrMapOvr>
+    <a:masterClrMapping/>
+  </p:clrMapOvr>
+  <p:timing>
+    <p:tnLst>
+      <p:par>
+        <p:cTn id="1" dur="indefinite" restart="never" nodeType="tmRoot"/>
+      </p:par>
+    </p:tnLst>
+  </p:timing>
+</p:sld>
+</file>
+
+<file path=ppt/slides/slide5.xml><?xml version="1.0" encoding="utf-8"?>
+<p:sld xmlns:a="http://schemas.openxmlformats.org/drawingml/2006/main" xmlns:r="http://schemas.openxmlformats.org/officeDocument/2006/relationships" xmlns:p="http://schemas.openxmlformats.org/presentationml/2006/main">
+  <p:cSld>
+    <p:spTree>
+      <p:nvGrpSpPr>
+        <p:cNvPr id="1" name=""/>
+        <p:cNvGrpSpPr/>
+        <p:nvPr/>
+      </p:nvGrpSpPr>
+      <p:grpSpPr>
+        <a:xfrm>
+          <a:off x="0" y="0"/>
+          <a:ext cx="0" cy="0"/>
+          <a:chOff x="0" y="0"/>
+          <a:chExt cx="0" cy="0"/>
+        </a:xfrm>
+      </p:grpSpPr>
+      <p:sp>
+        <p:nvSpPr>
+          <p:cNvPr id="2" name="Title 1"/>
+          <p:cNvSpPr>
+            <a:spLocks noGrp="1"/>
+          </p:cNvSpPr>
+          <p:nvPr>
+            <p:ph type="title"/>
+          </p:nvPr>
+        </p:nvSpPr>
+        <p:spPr>
+          <a:xfrm>
+            <a:off x="3803839" y="367374"/>
+            <a:ext cx="9404723" cy="1400530"/>
+          </a:xfrm>
+        </p:spPr>
+        <p:txBody>
+          <a:bodyPr/>
+          <a:lstStyle/>
+          <a:p>
+            <a:r>
+              <a:rPr lang="en-US" sz="6000" b="1" dirty="0"/>
+              <a:t>🚀 What We </a:t>
+            </a:r>
+            <a:r>
+              <a:rPr lang="en-US" sz="6000" b="1" dirty="0" smtClean="0"/>
+              <a:t>Do:</a:t>
+            </a:r>
+            <a:r>
+              <a:rPr lang="en-US" sz="6000" dirty="0"/>
+              <a:t/>
+            </a:r>
+            <a:br>
+              <a:rPr lang="en-US" sz="6000" dirty="0"/>
+            </a:br>
+            <a:endParaRPr lang="en-US" sz="6000" dirty="0"/>
+          </a:p>
+        </p:txBody>
+      </p:sp>
+      <p:sp>
+        <p:nvSpPr>
+          <p:cNvPr id="3" name="Content Placeholder 2"/>
+          <p:cNvSpPr>
+            <a:spLocks noGrp="1"/>
+          </p:cNvSpPr>
+          <p:nvPr>
+            <p:ph idx="1"/>
+          </p:nvPr>
+        </p:nvSpPr>
+        <p:spPr/>
+        <p:txBody>
+          <a:bodyPr>
+            <a:normAutofit fontScale="92500" lnSpcReduction="20000"/>
+          </a:bodyPr>
+          <a:lstStyle/>
+          <a:p>
+            <a:pPr lvl="0"/>
+            <a:r>
+              <a:rPr lang="en-US" sz="3200" dirty="0"/>
+              <a:t>Web Design &amp; </a:t>
+            </a:r>
+            <a:r>
+              <a:rPr lang="en-US" sz="3200" dirty="0" smtClean="0"/>
+              <a:t>Hosting</a:t>
+            </a:r>
+          </a:p>
+          <a:p>
+            <a:pPr lvl="0"/>
+            <a:endParaRPr lang="en-US" sz="3200" dirty="0"/>
+          </a:p>
+          <a:p>
+            <a:pPr lvl="0"/>
+            <a:r>
+              <a:rPr lang="en-US" sz="3200" dirty="0"/>
+              <a:t>Business Systems </a:t>
+            </a:r>
+            <a:r>
+              <a:rPr lang="en-US" sz="3200" dirty="0" smtClean="0"/>
+              <a:t>SOFTWARE Development</a:t>
+            </a:r>
+          </a:p>
+          <a:p>
+            <a:pPr lvl="0"/>
+            <a:endParaRPr lang="en-US" sz="3200" dirty="0"/>
+          </a:p>
+          <a:p>
+            <a:pPr lvl="0"/>
+            <a:r>
+              <a:rPr lang="en-US" sz="3200" dirty="0"/>
+              <a:t>Mobile </a:t>
+            </a:r>
+            <a:r>
+              <a:rPr lang="en-US" sz="3200" dirty="0" smtClean="0"/>
+              <a:t>Apps Software Development </a:t>
+            </a:r>
+          </a:p>
+          <a:p>
+            <a:pPr marL="0" lvl="0" indent="0">
+              <a:buNone/>
+            </a:pPr>
+            <a:endParaRPr lang="en-US" sz="3200" dirty="0" smtClean="0"/>
+          </a:p>
+          <a:p>
+            <a:pPr lvl="0"/>
+            <a:r>
+              <a:rPr lang="en-US" sz="3200" dirty="0" smtClean="0"/>
+              <a:t>Software project management</a:t>
+            </a:r>
+            <a:endParaRPr lang="en-US" sz="3200" dirty="0"/>
+          </a:p>
+          <a:p>
+            <a:pPr marL="0" indent="0">
+              <a:buNone/>
+            </a:pPr>
+            <a:r>
+              <a:rPr lang="en-US" sz="3200" dirty="0"/>
+              <a:t> </a:t>
+            </a:r>
+          </a:p>
+          <a:p>
+            <a:endParaRPr lang="en-US" sz="3200" dirty="0"/>
+          </a:p>
+        </p:txBody>
+      </p:sp>
+    </p:spTree>
+    <p:extLst>
+      <p:ext uri="{BB962C8B-B14F-4D97-AF65-F5344CB8AC3E}">
+        <p14:creationId xmlns:p14="http://schemas.microsoft.com/office/powerpoint/2010/main" val="12644166"/>
+      </p:ext>
+    </p:extLst>
+  </p:cSld>
+  <p:clrMapOvr>
+    <a:masterClrMapping/>
+  </p:clrMapOvr>
+  <p:timing>
+    <p:tnLst>
+      <p:par>
+        <p:cTn id="1" dur="indefinite" restart="never" nodeType="tmRoot"/>
+      </p:par>
+    </p:tnLst>
+  </p:timing>
+</p:sld>
+</file>
+
+<file path=ppt/slides/slide6.xml><?xml version="1.0" encoding="utf-8"?>
+<p:sld xmlns:a="http://schemas.openxmlformats.org/drawingml/2006/main" xmlns:r="http://schemas.openxmlformats.org/officeDocument/2006/relationships" xmlns:p="http://schemas.openxmlformats.org/presentationml/2006/main">
+  <p:cSld>
+    <p:spTree>
+      <p:nvGrpSpPr>
+        <p:cNvPr id="1" name=""/>
+        <p:cNvGrpSpPr/>
+        <p:nvPr/>
+      </p:nvGrpSpPr>
+      <p:grpSpPr>
+        <a:xfrm>
+          <a:off x="0" y="0"/>
+          <a:ext cx="0" cy="0"/>
+          <a:chOff x="0" y="0"/>
+          <a:chExt cx="0" cy="0"/>
+        </a:xfrm>
+      </p:grpSpPr>
+      <p:sp>
+        <p:nvSpPr>
+          <p:cNvPr id="2" name="Title 1"/>
+          <p:cNvSpPr>
+            <a:spLocks noGrp="1"/>
+          </p:cNvSpPr>
+          <p:nvPr>
+            <p:ph type="title"/>
+          </p:nvPr>
+        </p:nvSpPr>
+        <p:spPr>
+          <a:xfrm>
             <a:off x="2438335" y="652388"/>
             <a:ext cx="9404723" cy="1400530"/>
           </a:xfrm>
@@ -6701,7 +7074,19 @@
           <a:p>
             <a:r>
               <a:rPr lang="en-US" dirty="0" smtClean="0"/>
-              <a:t>Phone: +250784643357</a:t>
+              <a:t>Phone (</a:t>
+            </a:r>
+            <a:r>
+              <a:rPr lang="en-US" dirty="0" err="1" smtClean="0"/>
+              <a:t>Whatsapp</a:t>
+            </a:r>
+            <a:r>
+              <a:rPr lang="en-US" dirty="0" smtClean="0"/>
+              <a:t>): </a:t>
+            </a:r>
+            <a:r>
+              <a:rPr lang="en-US" dirty="0" smtClean="0"/>
+              <a:t>+250784643357</a:t>
             </a:r>
           </a:p>
           <a:p>
@@ -6711,9 +7096,15 @@
             <a:endParaRPr lang="en-US" dirty="0" smtClean="0"/>
           </a:p>
           <a:p>
+            <a:pPr marL="0" indent="0">
+              <a:buNone/>
+            </a:pPr>
             <a:endParaRPr lang="en-US" dirty="0"/>
           </a:p>
           <a:p>
+            <a:pPr marL="0" indent="0">
+              <a:buNone/>
+            </a:pPr>
             <a:endParaRPr lang="en-US" dirty="0" smtClean="0"/>
           </a:p>
           <a:p>
@@ -6726,11 +7117,50 @@
             <a:pPr marL="400050" lvl="1" indent="0" algn="r">
               <a:buNone/>
             </a:pPr>
+            <a:r>
+              <a:rPr lang="en-US" sz="2000" b="1" i="1" u="sng" dirty="0" smtClean="0">
+                <a:solidFill>
+                  <a:schemeClr val="accent2"/>
+                </a:solidFill>
+                <a:hlinkClick r:id="rId3"/>
+              </a:rPr>
+              <a:t>CLICK HERE </a:t>
+            </a:r>
             <a:r>
               <a:rPr lang="en-US" sz="2000" dirty="0" smtClean="0">
                 <a:hlinkClick r:id="rId3"/>
               </a:rPr>
-              <a:t>CLICK HERE TO VISIT MY LIFE STORY WEBSITE SAMPLE OR SCAN THE ABOVE QR CODE.</a:t>
+              <a:t>TO VISIT MY LIFE STORY WEBSITE SAMPLE </a:t>
+            </a:r>
+            <a:r>
+              <a:rPr lang="en-US" sz="2000" dirty="0" smtClean="0">
+                <a:hlinkClick r:id="rId3"/>
+              </a:rPr>
+              <a:t>--OR SCAN </a:t>
+            </a:r>
+            <a:r>
+              <a:rPr lang="en-US" sz="2000" dirty="0" smtClean="0">
+                <a:hlinkClick r:id="rId3"/>
+              </a:rPr>
+              <a:t>THE </a:t>
+            </a:r>
+            <a:r>
+              <a:rPr lang="en-US" sz="2000" dirty="0">
+                <a:hlinkClick r:id="rId3"/>
+              </a:rPr>
+              <a:t>ABOVE</a:t>
+            </a:r>
+            <a:r>
+              <a:rPr lang="en-US" sz="2000" dirty="0" smtClean="0">
+                <a:hlinkClick r:id="rId3"/>
+              </a:rPr>
+              <a:t>👆 </a:t>
+            </a:r>
+            <a:r>
+              <a:rPr lang="en-US" sz="2000" dirty="0" smtClean="0">
+                <a:hlinkClick r:id="rId3"/>
+              </a:rPr>
+              <a:t>QR CODE.</a:t>
             </a:r>
             <a:endParaRPr lang="en-US" sz="2000" dirty="0"/>
           </a:p>

--- a/documentation/🌍Eugene_life_story_website_sample.pptx
+++ b/documentation/🌍Eugene_life_story_website_sample.pptx
@@ -6154,18 +6154,7 @@
                   </a:schemeClr>
                 </a:solidFill>
               </a:rPr>
-              <a:t>By </a:t>
-            </a:r>
-            <a:r>
-              <a:rPr lang="en-US" sz="2400" b="1" dirty="0" smtClean="0">
-                <a:solidFill>
-                  <a:schemeClr val="accent5">
-                    <a:lumMod val="60000"/>
-                    <a:lumOff val="40000"/>
-                  </a:schemeClr>
-                </a:solidFill>
-              </a:rPr>
-              <a:t>Eugene </a:t>
+              <a:t>By Eugene </a:t>
             </a:r>
             <a:r>
               <a:rPr lang="en-US" sz="2400" b="1" dirty="0" err="1" smtClean="0">
@@ -6243,8 +6232,12 @@
               <a:rPr lang="en-US" sz="1600" dirty="0"/>
             </a:br>
             <a:r>
+              <a:rPr lang="en-US" sz="1600" b="1" dirty="0"/>
+              <a:t>Don’t let others write your story</a:t>
+            </a:r>
+            <a:r>
               <a:rPr lang="en-US" sz="1600" dirty="0"/>
-              <a:t>Don’t let others write your story — write your own</a:t>
+              <a:t> — write your own</a:t>
             </a:r>
             <a:r>
               <a:rPr lang="en-US" sz="1600" dirty="0" smtClean="0"/>
@@ -6260,8 +6253,12 @@
               <a:rPr lang="en-US" sz="1600" dirty="0"/>
             </a:br>
             <a:r>
+              <a:rPr lang="en-US" sz="1600" b="1" dirty="0"/>
+              <a:t>🖋️ Leave behind your real life story</a:t>
+            </a:r>
+            <a:r>
               <a:rPr lang="en-US" sz="1600" dirty="0"/>
-              <a:t>🖋️ Leave behind your real life story — as you lived it</a:t>
+              <a:t> — as you lived it</a:t>
             </a:r>
             <a:r>
               <a:rPr lang="en-US" sz="1600" dirty="0" smtClean="0"/>
@@ -6277,8 +6274,20 @@
               <a:rPr lang="en-US" sz="1600" dirty="0"/>
             </a:br>
             <a:r>
+              <a:rPr lang="en-US" sz="1600" b="1" dirty="0"/>
+              <a:t>📸 Organize your memories digitally</a:t>
+            </a:r>
+            <a:r>
               <a:rPr lang="en-US" sz="1600" dirty="0"/>
-              <a:t>📸 Organize your memories digitally — better than photo albums</a:t>
+              <a:t> — better than </a:t>
+            </a:r>
+            <a:r>
+              <a:rPr lang="en-US" sz="1600" dirty="0" smtClean="0"/>
+              <a:t>HARD photo </a:t>
+            </a:r>
+            <a:r>
+              <a:rPr lang="en-US" sz="1600" dirty="0"/>
+              <a:t>albums</a:t>
             </a:r>
             <a:r>
               <a:rPr lang="en-US" sz="1600" dirty="0" smtClean="0"/>
@@ -6294,8 +6303,12 @@
               <a:rPr lang="en-US" sz="1600" dirty="0"/>
             </a:br>
             <a:r>
+              <a:rPr lang="en-US" sz="1600" b="1" dirty="0"/>
+              <a:t>🔒 Private &amp; secure</a:t>
+            </a:r>
+            <a:r>
               <a:rPr lang="en-US" sz="1600" dirty="0"/>
-              <a:t>🔒 Private &amp; secure — only accessible by those you allow.</a:t>
+              <a:t> — only accessible by those you allow.</a:t>
             </a:r>
           </a:p>
           <a:p>
@@ -6389,7 +6402,7 @@
         </p:spPr>
         <p:txBody>
           <a:bodyPr>
-            <a:normAutofit fontScale="92500" lnSpcReduction="20000"/>
+            <a:normAutofit fontScale="85000" lnSpcReduction="10000"/>
           </a:bodyPr>
           <a:lstStyle/>
           <a:p>
@@ -6434,11 +6447,25 @@
               <a:buNone/>
             </a:pPr>
             <a:r>
-              <a:rPr lang="en-US" sz="2800" b="1" dirty="0"/>
+              <a:rPr lang="en-US" sz="2800" b="1" dirty="0">
+                <a:solidFill>
+                  <a:schemeClr val="bg2">
+                    <a:lumMod val="60000"/>
+                    <a:lumOff val="40000"/>
+                  </a:schemeClr>
+                </a:solidFill>
+              </a:rPr>
               <a:t>✨ Take it a step further</a:t>
             </a:r>
             <a:r>
-              <a:rPr lang="en-US" sz="2800" b="1" dirty="0" smtClean="0"/>
+              <a:rPr lang="en-US" sz="2800" b="1" dirty="0" smtClean="0">
+                <a:solidFill>
+                  <a:schemeClr val="bg2">
+                    <a:lumMod val="60000"/>
+                    <a:lumOff val="40000"/>
+                  </a:schemeClr>
+                </a:solidFill>
+              </a:rPr>
               <a:t>:</a:t>
             </a:r>
           </a:p>
@@ -6454,8 +6481,16 @@
               <a:rPr lang="en-US" sz="2800" b="1" dirty="0"/>
             </a:br>
             <a:r>
+              <a:rPr lang="en-US" sz="2800" b="1" dirty="0"/>
+              <a:t>🖨 </a:t>
+            </a:r>
+            <a:r>
+              <a:rPr lang="en-US" dirty="0" smtClean="0"/>
+              <a:t>Print </a:t>
+            </a:r>
+            <a:r>
               <a:rPr lang="en-US" dirty="0"/>
-              <a:t>Print a </a:t>
+              <a:t>a </a:t>
             </a:r>
             <a:r>
               <a:rPr lang="en-US" b="1" dirty="0"/>
@@ -6478,8 +6513,28 @@
           </a:p>
           <a:p>
             <a:r>
+              <a:rPr lang="en-US" sz="3500" dirty="0">
+                <a:solidFill>
+                  <a:schemeClr val="accent2"/>
+                </a:solidFill>
+              </a:rPr>
+              <a:t>Below</a:t>
+            </a:r>
+            <a:r>
+              <a:rPr lang="en-US" sz="3500" dirty="0" smtClean="0">
+                <a:solidFill>
+                  <a:schemeClr val="accent2"/>
+                </a:solidFill>
+              </a:rPr>
+              <a:t>👇</a:t>
+            </a:r>
+            <a:r>
+              <a:rPr lang="en-US" dirty="0" smtClean="0"/>
+              <a:t> </a:t>
+            </a:r>
+            <a:r>
               <a:rPr lang="en-US" dirty="0"/>
-              <a:t>Below is an example of a QR </a:t>
+              <a:t>is an example of a QR </a:t>
             </a:r>
             <a:r>
               <a:rPr lang="en-US" dirty="0" smtClean="0"/>
@@ -6495,20 +6550,81 @@
             </a:r>
             <a:r>
               <a:rPr lang="en-US" dirty="0"/>
-              <a:t>displayed on a living room wall — </a:t>
-            </a:r>
-            <a:r>
-              <a:rPr lang="en-US" i="1" u="sng" dirty="0"/>
+              <a:t>displayed on a living room </a:t>
+            </a:r>
+            <a:r>
+              <a:rPr lang="en-US" dirty="0" smtClean="0"/>
+              <a:t>wall. —</a:t>
+            </a:r>
+            <a:r>
+              <a:rPr lang="en-US" sz="2800" dirty="0" smtClean="0">
+                <a:solidFill>
+                  <a:schemeClr val="accent2"/>
+                </a:solidFill>
+              </a:rPr>
+              <a:t> </a:t>
+            </a:r>
+            <a:r>
+              <a:rPr lang="en-US" sz="2800" i="1" dirty="0">
+                <a:solidFill>
+                  <a:schemeClr val="accent2"/>
+                </a:solidFill>
+              </a:rPr>
               <a:t>a modern way to keep your story alive </a:t>
             </a:r>
             <a:r>
-              <a:rPr lang="en-US" i="1" u="sng" dirty="0" smtClean="0"/>
+              <a:rPr lang="en-US" sz="2800" i="1" dirty="0" smtClean="0">
+                <a:solidFill>
+                  <a:schemeClr val="accent2"/>
+                </a:solidFill>
+              </a:rPr>
               <a:t>and easily </a:t>
             </a:r>
             <a:r>
-              <a:rPr lang="en-US" i="1" u="sng" dirty="0"/>
-              <a:t>accessible.</a:t>
-            </a:r>
+              <a:rPr lang="en-US" sz="2800" i="1" dirty="0" smtClean="0">
+                <a:solidFill>
+                  <a:schemeClr val="accent2"/>
+                </a:solidFill>
+              </a:rPr>
+              <a:t>accessible </a:t>
+            </a:r>
+            <a:r>
+              <a:rPr lang="en-US" sz="2800" dirty="0" smtClean="0">
+                <a:solidFill>
+                  <a:schemeClr val="accent2"/>
+                </a:solidFill>
+              </a:rPr>
+              <a:t>👇 </a:t>
+            </a:r>
+            <a:r>
+              <a:rPr lang="en-US" dirty="0"/>
+              <a:t>(feel free to scan it</a:t>
+            </a:r>
+            <a:r>
+              <a:rPr lang="en-US" i="1" dirty="0">
+                <a:solidFill>
+                  <a:schemeClr val="accent2"/>
+                </a:solidFill>
+              </a:rPr>
+              <a:t> </a:t>
+            </a:r>
+            <a:r>
+              <a:rPr lang="en-US" i="1" dirty="0">
+                <a:solidFill>
+                  <a:schemeClr val="accent4"/>
+                </a:solidFill>
+              </a:rPr>
+              <a:t>🙂</a:t>
+            </a:r>
+            <a:r>
+              <a:rPr lang="en-US" dirty="0"/>
+              <a:t>)</a:t>
+            </a:r>
+            <a:endParaRPr lang="en-US" i="1" dirty="0">
+              <a:solidFill>
+                <a:schemeClr val="accent2"/>
+              </a:solidFill>
+            </a:endParaRPr>
           </a:p>
           <a:p>
             <a:endParaRPr lang="en-US" dirty="0"/>
@@ -6739,40 +6855,21 @@
             </a:r>
             <a:r>
               <a:rPr lang="en-US" sz="3600" dirty="0" smtClean="0"/>
-              <a:t>website of mine </a:t>
+              <a:t>website of </a:t>
+            </a:r>
+            <a:r>
+              <a:rPr lang="en-US" sz="3600" dirty="0" smtClean="0"/>
+              <a:t>mine was </a:t>
             </a:r>
             <a:r>
               <a:rPr lang="en-US" sz="3600" dirty="0"/>
-              <a:t>you’re </a:t>
+              <a:t>built just for fun and as a sample</a:t>
             </a:r>
             <a:r>
               <a:rPr lang="en-US" sz="3600" dirty="0" smtClean="0"/>
-              <a:t>seeing </a:t>
-            </a:r>
-            <a:r>
-              <a:rPr lang="en-US" sz="3600" b="1" i="1" dirty="0" smtClean="0"/>
-              <a:t>(click the link on the bottom of the last page </a:t>
-            </a:r>
-            <a:r>
-              <a:rPr lang="en-US" sz="3600" b="1" i="1" smtClean="0"/>
-              <a:t>to visit </a:t>
-            </a:r>
-            <a:r>
-              <a:rPr lang="en-US" sz="3600" b="1" i="1" dirty="0" smtClean="0"/>
-              <a:t>)</a:t>
-            </a:r>
-            <a:r>
-              <a:rPr lang="en-US" sz="3600" dirty="0" smtClean="0"/>
-              <a:t> </a:t>
-            </a:r>
-            <a:r>
-              <a:rPr lang="en-US" sz="3600" dirty="0"/>
-              <a:t>was built just for fun and as a sample</a:t>
-            </a:r>
-            <a:r>
-              <a:rPr lang="en-US" sz="3600" dirty="0" smtClean="0"/>
-              <a:t>.</a:t>
-            </a:r>
+              <a:t>. And it doesn’t include sensitive information as it’s just a sample without any protection.</a:t>
+            </a:r>
+            <a:endParaRPr lang="en-US" sz="3600" dirty="0" smtClean="0"/>
           </a:p>
           <a:p>
             <a:endParaRPr lang="en-US" sz="3600" dirty="0" smtClean="0"/>
@@ -7007,7 +7104,7 @@
         </p:nvSpPr>
         <p:spPr>
           <a:xfrm>
-            <a:off x="2438335" y="652388"/>
+            <a:off x="2391442" y="89680"/>
             <a:ext cx="9404723" cy="1400530"/>
           </a:xfrm>
         </p:spPr>
@@ -7046,156 +7143,364 @@
         </p:nvSpPr>
         <p:spPr>
           <a:xfrm>
-            <a:off x="298640" y="2052918"/>
-            <a:ext cx="11698288" cy="4640490"/>
+            <a:off x="97877" y="1490209"/>
+            <a:ext cx="11698288" cy="5227113"/>
           </a:xfrm>
         </p:spPr>
         <p:txBody>
           <a:bodyPr>
-            <a:normAutofit/>
+            <a:normAutofit fontScale="47500" lnSpcReduction="20000"/>
           </a:bodyPr>
           <a:lstStyle/>
           <a:p>
             <a:r>
-              <a:rPr lang="en-US" dirty="0" smtClean="0"/>
+              <a:rPr lang="en-US" sz="4400" dirty="0" smtClean="0"/>
               <a:t>Email:  </a:t>
             </a:r>
             <a:r>
-              <a:rPr lang="en-US" dirty="0" smtClean="0">
+              <a:rPr lang="en-US" sz="4400" dirty="0" smtClean="0">
                 <a:hlinkClick r:id="rId2"/>
               </a:rPr>
               <a:t>eugenembayire@gmail.com</a:t>
             </a:r>
-            <a:endParaRPr lang="en-US" dirty="0" smtClean="0"/>
-          </a:p>
-          <a:p>
-            <a:endParaRPr lang="en-US" dirty="0"/>
-          </a:p>
-          <a:p>
-            <a:r>
-              <a:rPr lang="en-US" dirty="0" smtClean="0"/>
+            <a:endParaRPr lang="en-US" sz="4400" dirty="0" smtClean="0"/>
+          </a:p>
+          <a:p>
+            <a:endParaRPr lang="en-US" sz="4400" dirty="0"/>
+          </a:p>
+          <a:p>
+            <a:r>
+              <a:rPr lang="en-US" sz="4400" dirty="0" smtClean="0"/>
               <a:t>Phone (</a:t>
             </a:r>
             <a:r>
-              <a:rPr lang="en-US" dirty="0" err="1" smtClean="0"/>
+              <a:rPr lang="en-US" sz="4400" dirty="0" err="1" smtClean="0"/>
               <a:t>Whatsapp</a:t>
             </a:r>
             <a:r>
-              <a:rPr lang="en-US" dirty="0" smtClean="0"/>
+              <a:rPr lang="en-US" sz="4400" dirty="0" smtClean="0"/>
+              <a:t> &amp; M</a:t>
+            </a:r>
+            <a:r>
+              <a:rPr lang="en-US" sz="4400" i="1" dirty="0">
+                <a:solidFill>
+                  <a:schemeClr val="accent4"/>
+                </a:solidFill>
+                <a:effectLst>
+                  <a:outerShdw blurRad="38100" dist="38100" dir="2700000" algn="tl">
+                    <a:srgbClr val="000000">
+                      <a:alpha val="43137"/>
+                    </a:srgbClr>
+                  </a:outerShdw>
+                </a:effectLst>
+              </a:rPr>
+              <a:t> </a:t>
+            </a:r>
+            <a:r>
+              <a:rPr lang="en-US" sz="4400" dirty="0">
+                <a:solidFill>
+                  <a:schemeClr val="accent4"/>
+                </a:solidFill>
+                <a:effectLst>
+                  <a:outerShdw blurRad="38100" dist="38100" dir="2700000" algn="tl">
+                    <a:srgbClr val="000000">
+                      <a:alpha val="43137"/>
+                    </a:srgbClr>
+                  </a:outerShdw>
+                </a:effectLst>
+              </a:rPr>
+              <a:t>🙂 </a:t>
+            </a:r>
+            <a:r>
+              <a:rPr lang="en-US" sz="4400" dirty="0" smtClean="0"/>
+              <a:t>M</a:t>
+            </a:r>
+            <a:r>
+              <a:rPr lang="en-US" sz="4200" b="1" dirty="0">
+                <a:effectLst>
+                  <a:outerShdw blurRad="38100" dist="38100" dir="2700000" algn="tl">
+                    <a:srgbClr val="000000">
+                      <a:alpha val="43137"/>
+                    </a:srgbClr>
+                  </a:outerShdw>
+                </a:effectLst>
+              </a:rPr>
+              <a:t>O</a:t>
+            </a:r>
+            <a:r>
+              <a:rPr lang="en-US" sz="1800" b="1" i="1" dirty="0" smtClean="0">
+                <a:solidFill>
+                  <a:schemeClr val="accent4"/>
+                </a:solidFill>
+                <a:effectLst>
+                  <a:outerShdw blurRad="38100" dist="38100" dir="2700000" algn="tl">
+                    <a:srgbClr val="000000">
+                      <a:alpha val="43137"/>
+                    </a:srgbClr>
+                  </a:outerShdw>
+                </a:effectLst>
+              </a:rPr>
+              <a:t> </a:t>
+            </a:r>
+            <a:r>
+              <a:rPr lang="en-US" sz="4400" dirty="0" smtClean="0"/>
               <a:t>): </a:t>
             </a:r>
             <a:r>
-              <a:rPr lang="en-US" dirty="0" smtClean="0"/>
-              <a:t>+250784643357</a:t>
-            </a:r>
-          </a:p>
-          <a:p>
-            <a:endParaRPr lang="en-US" dirty="0"/>
-          </a:p>
-          <a:p>
-            <a:endParaRPr lang="en-US" dirty="0" smtClean="0"/>
+              <a:rPr lang="en-US" sz="4400" dirty="0" smtClean="0"/>
+              <a:t>+</a:t>
+            </a:r>
+            <a:r>
+              <a:rPr lang="en-US" sz="4400" dirty="0" smtClean="0"/>
+              <a:t>250784643357</a:t>
+            </a:r>
           </a:p>
           <a:p>
             <a:pPr marL="0" indent="0">
               <a:buNone/>
             </a:pPr>
-            <a:endParaRPr lang="en-US" dirty="0"/>
+            <a:endParaRPr lang="en-US" sz="4400" dirty="0"/>
           </a:p>
           <a:p>
             <a:pPr marL="0" indent="0">
               <a:buNone/>
             </a:pPr>
-            <a:endParaRPr lang="en-US" dirty="0" smtClean="0"/>
-          </a:p>
-          <a:p>
-            <a:endParaRPr lang="en-US" dirty="0" smtClean="0"/>
-          </a:p>
-          <a:p>
-            <a:endParaRPr lang="en-US" dirty="0" smtClean="0"/>
+            <a:r>
+              <a:rPr lang="en-US" sz="4400" dirty="0" smtClean="0"/>
+              <a:t>							</a:t>
+            </a:r>
+          </a:p>
+          <a:p>
+            <a:pPr marL="0" indent="0">
+              <a:buNone/>
+            </a:pPr>
+            <a:r>
+              <a:rPr lang="en-US" sz="4400" dirty="0"/>
+              <a:t>	</a:t>
+            </a:r>
+            <a:r>
+              <a:rPr lang="en-US" sz="4400" dirty="0" smtClean="0"/>
+              <a:t>					</a:t>
+            </a:r>
+            <a:r>
+              <a:rPr lang="en-US" sz="5800" b="1" dirty="0" smtClean="0"/>
+              <a:t>SCAN </a:t>
+            </a:r>
+            <a:r>
+              <a:rPr lang="en-US" sz="5800" b="1" dirty="0"/>
+              <a:t>THE ABOVE </a:t>
+            </a:r>
+            <a:r>
+              <a:rPr lang="en-US" sz="5800" b="1" dirty="0" smtClean="0"/>
+              <a:t>👆 </a:t>
+            </a:r>
+            <a:r>
+              <a:rPr lang="en-US" sz="5800" b="1" dirty="0" smtClean="0"/>
+              <a:t>QR CODE (ON </a:t>
+            </a:r>
+            <a:r>
+              <a:rPr lang="en-US" sz="5800" b="1" dirty="0">
+                <a:solidFill>
+                  <a:schemeClr val="accent1">
+                    <a:lumMod val="40000"/>
+                    <a:lumOff val="60000"/>
+                  </a:schemeClr>
+                </a:solidFill>
+              </a:rPr>
+              <a:t>PAGE3</a:t>
+            </a:r>
+            <a:r>
+              <a:rPr lang="en-US" sz="5800" b="1" dirty="0"/>
+              <a:t>) </a:t>
+            </a:r>
+            <a:r>
+              <a:rPr lang="en-US" sz="5800" b="1" dirty="0" smtClean="0"/>
+              <a:t>👆</a:t>
+            </a:r>
+            <a:endParaRPr lang="en-US" sz="5800" b="1" dirty="0" smtClean="0"/>
+          </a:p>
+          <a:p>
+            <a:pPr marL="0" indent="0">
+              <a:buNone/>
+            </a:pPr>
+            <a:r>
+              <a:rPr lang="en-US" sz="4400" dirty="0" smtClean="0"/>
+              <a:t>									</a:t>
+            </a:r>
+          </a:p>
+          <a:p>
+            <a:pPr marL="0" indent="0">
+              <a:buNone/>
+            </a:pPr>
+            <a:r>
+              <a:rPr lang="en-US" sz="4400" dirty="0"/>
+              <a:t>	</a:t>
+            </a:r>
+            <a:r>
+              <a:rPr lang="en-US" sz="4400" dirty="0" smtClean="0"/>
+              <a:t>											</a:t>
+            </a:r>
+            <a:r>
+              <a:rPr lang="en-US" sz="9300" b="1" dirty="0" smtClean="0"/>
+              <a:t>OR</a:t>
+            </a:r>
+            <a:endParaRPr lang="en-US" sz="4400" b="1" dirty="0" smtClean="0"/>
           </a:p>
           <a:p>
             <a:pPr marL="400050" lvl="1" indent="0" algn="r">
               <a:buNone/>
             </a:pPr>
             <a:r>
-              <a:rPr lang="en-US" sz="2000" b="1" i="1" u="sng" dirty="0" smtClean="0">
+              <a:rPr lang="en-US" sz="16600" b="1" i="1" dirty="0" smtClean="0">
                 <a:solidFill>
                   <a:schemeClr val="accent2"/>
                 </a:solidFill>
+                <a:effectLst>
+                  <a:outerShdw blurRad="38100" dist="38100" dir="2700000" algn="tl">
+                    <a:srgbClr val="000000">
+                      <a:alpha val="43137"/>
+                    </a:srgbClr>
+                  </a:outerShdw>
+                </a:effectLst>
                 <a:hlinkClick r:id="rId3"/>
               </a:rPr>
-              <a:t>CLICK HERE </a:t>
-            </a:r>
-            <a:r>
-              <a:rPr lang="en-US" sz="2000" dirty="0" smtClean="0">
+              <a:t>CLICK </a:t>
+            </a:r>
+            <a:r>
+              <a:rPr lang="en-US" sz="16600" b="1" i="1" dirty="0" smtClean="0">
+                <a:solidFill>
+                  <a:schemeClr val="accent2"/>
+                </a:solidFill>
+                <a:effectLst>
+                  <a:outerShdw blurRad="38100" dist="38100" dir="2700000" algn="tl">
+                    <a:srgbClr val="000000">
+                      <a:alpha val="43137"/>
+                    </a:srgbClr>
+                  </a:outerShdw>
+                </a:effectLst>
                 <a:hlinkClick r:id="rId3"/>
               </a:rPr>
-              <a:t>TO VISIT MY LIFE STORY WEBSITE SAMPLE </a:t>
-            </a:r>
-            <a:r>
-              <a:rPr lang="en-US" sz="2000" dirty="0" smtClean="0">
+              <a:t>HERE</a:t>
+            </a:r>
+            <a:r>
+              <a:rPr lang="en-US" sz="16600" i="1" dirty="0" smtClean="0">
+                <a:solidFill>
+                  <a:schemeClr val="accent2"/>
+                </a:solidFill>
+                <a:effectLst>
+                  <a:outerShdw blurRad="38100" dist="38100" dir="2700000" algn="tl">
+                    <a:srgbClr val="000000">
+                      <a:alpha val="43137"/>
+                    </a:srgbClr>
+                  </a:outerShdw>
+                </a:effectLst>
                 <a:hlinkClick r:id="rId3"/>
               </a:rPr>
-              <a:t>--OR SCAN </a:t>
-            </a:r>
-            <a:r>
-              <a:rPr lang="en-US" sz="2000" dirty="0" smtClean="0">
+              <a:t> </a:t>
+            </a:r>
+            <a:r>
+              <a:rPr lang="en-US" sz="4200" i="1" dirty="0" smtClean="0">
+                <a:solidFill>
+                  <a:schemeClr val="accent2"/>
+                </a:solidFill>
+                <a:effectLst>
+                  <a:outerShdw blurRad="38100" dist="38100" dir="2700000" algn="tl">
+                    <a:srgbClr val="000000">
+                      <a:alpha val="43137"/>
+                    </a:srgbClr>
+                  </a:outerShdw>
+                </a:effectLst>
                 <a:hlinkClick r:id="rId3"/>
               </a:rPr>
-              <a:t>THE </a:t>
-            </a:r>
-            <a:r>
-              <a:rPr lang="en-US" sz="2000" dirty="0">
+              <a:t>TO VISIT MY LIFE </a:t>
+            </a:r>
+            <a:r>
+              <a:rPr lang="en-US" sz="4200" i="1" dirty="0" smtClean="0">
+                <a:solidFill>
+                  <a:schemeClr val="accent2"/>
+                </a:solidFill>
+                <a:effectLst>
+                  <a:outerShdw blurRad="38100" dist="38100" dir="2700000" algn="tl">
+                    <a:srgbClr val="000000">
+                      <a:alpha val="43137"/>
+                    </a:srgbClr>
+                  </a:outerShdw>
+                </a:effectLst>
                 <a:hlinkClick r:id="rId3"/>
               </a:rPr>
-              <a:t>ABOVE</a:t>
-            </a:r>
-            <a:r>
-              <a:rPr lang="en-US" sz="2000" dirty="0" smtClean="0">
+              <a:t>STORY </a:t>
+            </a:r>
+            <a:r>
+              <a:rPr lang="en-US" sz="4200" i="1" dirty="0" smtClean="0">
+                <a:solidFill>
+                  <a:schemeClr val="accent2"/>
+                </a:solidFill>
+                <a:effectLst>
+                  <a:outerShdw blurRad="38100" dist="38100" dir="2700000" algn="tl">
+                    <a:srgbClr val="000000">
+                      <a:alpha val="43137"/>
+                    </a:srgbClr>
+                  </a:outerShdw>
+                </a:effectLst>
                 <a:hlinkClick r:id="rId3"/>
               </a:rPr>
-              <a:t>👆 </a:t>
-            </a:r>
-            <a:r>
-              <a:rPr lang="en-US" sz="2000" dirty="0" smtClean="0">
+              <a:t>SAMPLE</a:t>
+            </a:r>
+            <a:r>
+              <a:rPr lang="en-US" sz="4200" i="1" dirty="0" smtClean="0">
+                <a:solidFill>
+                  <a:schemeClr val="accent2"/>
+                </a:solidFill>
+                <a:effectLst>
+                  <a:outerShdw blurRad="38100" dist="38100" dir="2700000" algn="tl">
+                    <a:srgbClr val="000000">
+                      <a:alpha val="43137"/>
+                    </a:srgbClr>
+                  </a:outerShdw>
+                </a:effectLst>
                 <a:hlinkClick r:id="rId3"/>
               </a:rPr>
-              <a:t>QR CODE.</a:t>
-            </a:r>
+              <a:t> WEBSITE</a:t>
+            </a:r>
+          </a:p>
+          <a:p>
+            <a:pPr marL="400050" lvl="1" indent="0" algn="r">
+              <a:buNone/>
+            </a:pPr>
+            <a:endParaRPr lang="en-US" sz="10600" b="1" i="1" dirty="0" smtClean="0">
+              <a:effectLst>
+                <a:outerShdw blurRad="38100" dist="38100" dir="2700000" algn="tl">
+                  <a:srgbClr val="000000">
+                    <a:alpha val="43137"/>
+                  </a:srgbClr>
+                </a:outerShdw>
+              </a:effectLst>
+              <a:hlinkClick r:id="rId3"/>
+            </a:endParaRPr>
+          </a:p>
+          <a:p>
+            <a:pPr marL="400050" lvl="1" indent="0" algn="r">
+              <a:buNone/>
+            </a:pPr>
+            <a:endParaRPr lang="en-US" sz="10600" b="1" i="1" dirty="0">
+              <a:effectLst>
+                <a:outerShdw blurRad="38100" dist="38100" dir="2700000" algn="tl">
+                  <a:srgbClr val="000000">
+                    <a:alpha val="43137"/>
+                  </a:srgbClr>
+                </a:outerShdw>
+              </a:effectLst>
+              <a:hlinkClick r:id="rId3"/>
+            </a:endParaRPr>
+          </a:p>
+          <a:p>
+            <a:pPr marL="400050" lvl="1" indent="0" algn="r">
+              <a:buNone/>
+            </a:pPr>
             <a:endParaRPr lang="en-US" sz="2000" dirty="0"/>
           </a:p>
         </p:txBody>
       </p:sp>
-      <p:pic>
-        <p:nvPicPr>
-          <p:cNvPr id="4" name="Picture 3"/>
-          <p:cNvPicPr>
-            <a:picLocks noChangeAspect="1"/>
-          </p:cNvPicPr>
-          <p:nvPr/>
-        </p:nvPicPr>
-        <p:blipFill>
-          <a:blip r:embed="rId4" cstate="print">
-            <a:extLst>
-              <a:ext uri="{28A0092B-C50C-407E-A947-70E740481C1C}">
-                <a14:useLocalDpi xmlns:a14="http://schemas.microsoft.com/office/drawing/2010/main" val="0"/>
-              </a:ext>
-            </a:extLst>
-          </a:blip>
-          <a:stretch>
-            <a:fillRect/>
-          </a:stretch>
-        </p:blipFill>
-        <p:spPr>
-          <a:xfrm>
-            <a:off x="7168896" y="1728216"/>
-            <a:ext cx="4303776" cy="3861816"/>
-          </a:xfrm>
-          <a:prstGeom prst="rect">
-            <a:avLst/>
-          </a:prstGeom>
-        </p:spPr>
-      </p:pic>
     </p:spTree>
     <p:extLst>
       <p:ext uri="{BB962C8B-B14F-4D97-AF65-F5344CB8AC3E}">

--- a/documentation/🌍Eugene_life_story_website_sample.pptx
+++ b/documentation/🌍Eugene_life_story_website_sample.pptx
@@ -11,6 +11,7 @@
     <p:sldId id="257" r:id="rId5"/>
     <p:sldId id="258" r:id="rId6"/>
     <p:sldId id="259" r:id="rId7"/>
+    <p:sldId id="262" r:id="rId8"/>
   </p:sldIdLst>
   <p:sldSz cx="12192000" cy="6858000"/>
   <p:notesSz cx="6858000" cy="9144000"/>
@@ -314,7 +315,7 @@
           <a:p>
             <a:fld id="{00AFC816-D61A-4F5D-88B8-4E6F6AD20135}" type="datetimeFigureOut">
               <a:rPr lang="en-US" smtClean="0"/>
-              <a:t>7/5/2025</a:t>
+              <a:t>7/6/2025</a:t>
             </a:fld>
             <a:endParaRPr lang="en-US"/>
           </a:p>
@@ -589,7 +590,7 @@
           <a:p>
             <a:fld id="{00AFC816-D61A-4F5D-88B8-4E6F6AD20135}" type="datetimeFigureOut">
               <a:rPr lang="en-US" smtClean="0"/>
-              <a:t>7/5/2025</a:t>
+              <a:t>7/6/2025</a:t>
             </a:fld>
             <a:endParaRPr lang="en-US"/>
           </a:p>
@@ -783,7 +784,7 @@
           <a:p>
             <a:fld id="{00AFC816-D61A-4F5D-88B8-4E6F6AD20135}" type="datetimeFigureOut">
               <a:rPr lang="en-US" smtClean="0"/>
-              <a:t>7/5/2025</a:t>
+              <a:t>7/6/2025</a:t>
             </a:fld>
             <a:endParaRPr lang="en-US"/>
           </a:p>
@@ -1056,7 +1057,7 @@
           <a:p>
             <a:fld id="{00AFC816-D61A-4F5D-88B8-4E6F6AD20135}" type="datetimeFigureOut">
               <a:rPr lang="en-US" smtClean="0"/>
-              <a:t>7/5/2025</a:t>
+              <a:t>7/6/2025</a:t>
             </a:fld>
             <a:endParaRPr lang="en-US"/>
           </a:p>
@@ -1397,7 +1398,7 @@
           <a:p>
             <a:fld id="{00AFC816-D61A-4F5D-88B8-4E6F6AD20135}" type="datetimeFigureOut">
               <a:rPr lang="en-US" smtClean="0"/>
-              <a:t>7/5/2025</a:t>
+              <a:t>7/6/2025</a:t>
             </a:fld>
             <a:endParaRPr lang="en-US"/>
           </a:p>
@@ -2020,7 +2021,7 @@
           <a:p>
             <a:fld id="{00AFC816-D61A-4F5D-88B8-4E6F6AD20135}" type="datetimeFigureOut">
               <a:rPr lang="en-US" smtClean="0"/>
-              <a:t>7/5/2025</a:t>
+              <a:t>7/6/2025</a:t>
             </a:fld>
             <a:endParaRPr lang="en-US"/>
           </a:p>
@@ -2880,7 +2881,7 @@
           <a:p>
             <a:fld id="{00AFC816-D61A-4F5D-88B8-4E6F6AD20135}" type="datetimeFigureOut">
               <a:rPr lang="en-US" smtClean="0"/>
-              <a:t>7/5/2025</a:t>
+              <a:t>7/6/2025</a:t>
             </a:fld>
             <a:endParaRPr lang="en-US"/>
           </a:p>
@@ -3050,7 +3051,7 @@
           <a:p>
             <a:fld id="{00AFC816-D61A-4F5D-88B8-4E6F6AD20135}" type="datetimeFigureOut">
               <a:rPr lang="en-US" smtClean="0"/>
-              <a:t>7/5/2025</a:t>
+              <a:t>7/6/2025</a:t>
             </a:fld>
             <a:endParaRPr lang="en-US"/>
           </a:p>
@@ -3230,7 +3231,7 @@
           <a:p>
             <a:fld id="{00AFC816-D61A-4F5D-88B8-4E6F6AD20135}" type="datetimeFigureOut">
               <a:rPr lang="en-US" smtClean="0"/>
-              <a:t>7/5/2025</a:t>
+              <a:t>7/6/2025</a:t>
             </a:fld>
             <a:endParaRPr lang="en-US"/>
           </a:p>
@@ -3400,7 +3401,7 @@
           <a:p>
             <a:fld id="{00AFC816-D61A-4F5D-88B8-4E6F6AD20135}" type="datetimeFigureOut">
               <a:rPr lang="en-US" smtClean="0"/>
-              <a:t>7/5/2025</a:t>
+              <a:t>7/6/2025</a:t>
             </a:fld>
             <a:endParaRPr lang="en-US"/>
           </a:p>
@@ -3647,7 +3648,7 @@
           <a:p>
             <a:fld id="{00AFC816-D61A-4F5D-88B8-4E6F6AD20135}" type="datetimeFigureOut">
               <a:rPr lang="en-US" smtClean="0"/>
-              <a:t>7/5/2025</a:t>
+              <a:t>7/6/2025</a:t>
             </a:fld>
             <a:endParaRPr lang="en-US"/>
           </a:p>
@@ -3939,7 +3940,7 @@
           <a:p>
             <a:fld id="{00AFC816-D61A-4F5D-88B8-4E6F6AD20135}" type="datetimeFigureOut">
               <a:rPr lang="en-US" smtClean="0"/>
-              <a:t>7/5/2025</a:t>
+              <a:t>7/6/2025</a:t>
             </a:fld>
             <a:endParaRPr lang="en-US"/>
           </a:p>
@@ -4383,7 +4384,7 @@
           <a:p>
             <a:fld id="{00AFC816-D61A-4F5D-88B8-4E6F6AD20135}" type="datetimeFigureOut">
               <a:rPr lang="en-US" smtClean="0"/>
-              <a:t>7/5/2025</a:t>
+              <a:t>7/6/2025</a:t>
             </a:fld>
             <a:endParaRPr lang="en-US"/>
           </a:p>
@@ -4501,7 +4502,7 @@
           <a:p>
             <a:fld id="{00AFC816-D61A-4F5D-88B8-4E6F6AD20135}" type="datetimeFigureOut">
               <a:rPr lang="en-US" smtClean="0"/>
-              <a:t>7/5/2025</a:t>
+              <a:t>7/6/2025</a:t>
             </a:fld>
             <a:endParaRPr lang="en-US"/>
           </a:p>
@@ -4596,7 +4597,7 @@
           <a:p>
             <a:fld id="{00AFC816-D61A-4F5D-88B8-4E6F6AD20135}" type="datetimeFigureOut">
               <a:rPr lang="en-US" smtClean="0"/>
-              <a:t>7/5/2025</a:t>
+              <a:t>7/6/2025</a:t>
             </a:fld>
             <a:endParaRPr lang="en-US"/>
           </a:p>
@@ -4875,7 +4876,7 @@
           <a:p>
             <a:fld id="{00AFC816-D61A-4F5D-88B8-4E6F6AD20135}" type="datetimeFigureOut">
               <a:rPr lang="en-US" smtClean="0"/>
-              <a:t>7/5/2025</a:t>
+              <a:t>7/6/2025</a:t>
             </a:fld>
             <a:endParaRPr lang="en-US"/>
           </a:p>
@@ -5150,7 +5151,7 @@
           <a:p>
             <a:fld id="{00AFC816-D61A-4F5D-88B8-4E6F6AD20135}" type="datetimeFigureOut">
               <a:rPr lang="en-US" smtClean="0"/>
-              <a:t>7/5/2025</a:t>
+              <a:t>7/6/2025</a:t>
             </a:fld>
             <a:endParaRPr lang="en-US"/>
           </a:p>
@@ -5579,7 +5580,7 @@
           <a:p>
             <a:fld id="{00AFC816-D61A-4F5D-88B8-4E6F6AD20135}" type="datetimeFigureOut">
               <a:rPr lang="en-US" smtClean="0"/>
-              <a:t>7/5/2025</a:t>
+              <a:t>7/6/2025</a:t>
             </a:fld>
             <a:endParaRPr lang="en-US"/>
           </a:p>
@@ -6578,15 +6579,7 @@
                   <a:schemeClr val="accent2"/>
                 </a:solidFill>
               </a:rPr>
-              <a:t>and easily </a:t>
-            </a:r>
-            <a:r>
-              <a:rPr lang="en-US" sz="2800" i="1" dirty="0" smtClean="0">
-                <a:solidFill>
-                  <a:schemeClr val="accent2"/>
-                </a:solidFill>
-              </a:rPr>
-              <a:t>accessible </a:t>
+              <a:t>and easily accessible </a:t>
             </a:r>
             <a:r>
               <a:rPr lang="en-US" sz="2800" dirty="0" smtClean="0">
@@ -6855,11 +6848,7 @@
             </a:r>
             <a:r>
               <a:rPr lang="en-US" sz="3600" dirty="0" smtClean="0"/>
-              <a:t>website of </a:t>
-            </a:r>
-            <a:r>
-              <a:rPr lang="en-US" sz="3600" dirty="0" smtClean="0"/>
-              <a:t>mine was </a:t>
+              <a:t>website of mine was </a:t>
             </a:r>
             <a:r>
               <a:rPr lang="en-US" sz="3600" dirty="0"/>
@@ -6869,7 +6858,6 @@
               <a:rPr lang="en-US" sz="3600" dirty="0" smtClean="0"/>
               <a:t>. And it doesn’t include sensitive information as it’s just a sample without any protection.</a:t>
             </a:r>
-            <a:endParaRPr lang="en-US" sz="3600" dirty="0" smtClean="0"/>
           </a:p>
           <a:p>
             <a:endParaRPr lang="en-US" sz="3600" dirty="0" smtClean="0"/>
@@ -7149,13 +7137,20 @@
         </p:spPr>
         <p:txBody>
           <a:bodyPr>
-            <a:normAutofit fontScale="47500" lnSpcReduction="20000"/>
+            <a:normAutofit/>
           </a:bodyPr>
           <a:lstStyle/>
           <a:p>
+            <a:endParaRPr lang="en-US" sz="4400" dirty="0" smtClean="0"/>
+          </a:p>
+          <a:p>
             <a:r>
               <a:rPr lang="en-US" sz="4400" dirty="0" smtClean="0"/>
-              <a:t>Email:  </a:t>
+              <a:t>Email</a:t>
+            </a:r>
+            <a:r>
+              <a:rPr lang="en-US" sz="4400" dirty="0" smtClean="0"/>
+              <a:t>:  </a:t>
             </a:r>
             <a:r>
               <a:rPr lang="en-US" sz="4400" dirty="0" smtClean="0">
@@ -7166,23 +7161,33 @@
             <a:endParaRPr lang="en-US" sz="4400" dirty="0" smtClean="0"/>
           </a:p>
           <a:p>
-            <a:endParaRPr lang="en-US" sz="4400" dirty="0"/>
-          </a:p>
-          <a:p>
-            <a:r>
-              <a:rPr lang="en-US" sz="4400" dirty="0" smtClean="0"/>
-              <a:t>Phone (</a:t>
-            </a:r>
-            <a:r>
-              <a:rPr lang="en-US" sz="4400" dirty="0" err="1" smtClean="0"/>
+            <a:pPr marL="0" indent="0">
+              <a:buNone/>
+            </a:pPr>
+            <a:endParaRPr lang="en-US" sz="3600" dirty="0" smtClean="0"/>
+          </a:p>
+          <a:p>
+            <a:endParaRPr lang="en-US" sz="3600" dirty="0"/>
+          </a:p>
+          <a:p>
+            <a:r>
+              <a:rPr lang="en-US" sz="3600" dirty="0" smtClean="0"/>
+              <a:t>Phone </a:t>
+            </a:r>
+            <a:r>
+              <a:rPr lang="en-US" sz="3600" dirty="0" smtClean="0"/>
+              <a:t>(</a:t>
+            </a:r>
+            <a:r>
+              <a:rPr lang="en-US" sz="3600" dirty="0" err="1" smtClean="0"/>
               <a:t>Whatsapp</a:t>
             </a:r>
             <a:r>
-              <a:rPr lang="en-US" sz="4400" dirty="0" smtClean="0"/>
+              <a:rPr lang="en-US" sz="3600" dirty="0" smtClean="0"/>
               <a:t> &amp; M</a:t>
             </a:r>
             <a:r>
-              <a:rPr lang="en-US" sz="4400" i="1" dirty="0">
+              <a:rPr lang="en-US" sz="3600" i="1" dirty="0">
                 <a:solidFill>
                   <a:schemeClr val="accent4"/>
                 </a:solidFill>
@@ -7197,7 +7202,7 @@
               <a:t> </a:t>
             </a:r>
             <a:r>
-              <a:rPr lang="en-US" sz="4400" dirty="0">
+              <a:rPr lang="en-US" sz="3600" dirty="0">
                 <a:solidFill>
                   <a:schemeClr val="accent4"/>
                 </a:solidFill>
@@ -7212,11 +7217,11 @@
               <a:t>🙂 </a:t>
             </a:r>
             <a:r>
-              <a:rPr lang="en-US" sz="4400" dirty="0" smtClean="0"/>
+              <a:rPr lang="en-US" sz="3600" dirty="0" smtClean="0"/>
               <a:t>M</a:t>
             </a:r>
             <a:r>
-              <a:rPr lang="en-US" sz="4200" b="1" dirty="0">
+              <a:rPr lang="en-US" sz="3600" b="1" dirty="0">
                 <a:effectLst>
                   <a:outerShdw blurRad="38100" dist="38100" dir="2700000" algn="tl">
                     <a:srgbClr val="000000">
@@ -7228,7 +7233,7 @@
               <a:t>O</a:t>
             </a:r>
             <a:r>
-              <a:rPr lang="en-US" sz="1800" b="1" i="1" dirty="0" smtClean="0">
+              <a:rPr lang="en-US" sz="1400" b="1" i="1" dirty="0" smtClean="0">
                 <a:solidFill>
                   <a:schemeClr val="accent4"/>
                 </a:solidFill>
@@ -7243,63 +7248,181 @@
               <a:t> </a:t>
             </a:r>
             <a:r>
-              <a:rPr lang="en-US" sz="4400" dirty="0" smtClean="0"/>
-              <a:t>): </a:t>
-            </a:r>
-            <a:r>
-              <a:rPr lang="en-US" sz="4400" dirty="0" smtClean="0"/>
-              <a:t>+</a:t>
-            </a:r>
-            <a:r>
-              <a:rPr lang="en-US" sz="4400" dirty="0" smtClean="0"/>
+              <a:rPr lang="en-US" sz="3600" dirty="0" smtClean="0"/>
+              <a:t>): +</a:t>
+            </a:r>
+            <a:r>
+              <a:rPr lang="en-US" sz="3600" dirty="0" smtClean="0"/>
               <a:t>250784643357</a:t>
             </a:r>
-          </a:p>
+            <a:endParaRPr lang="en-US" sz="8800" b="1" i="1" dirty="0" smtClean="0">
+              <a:effectLst>
+                <a:outerShdw blurRad="38100" dist="38100" dir="2700000" algn="tl">
+                  <a:srgbClr val="000000">
+                    <a:alpha val="43137"/>
+                  </a:srgbClr>
+                </a:outerShdw>
+              </a:effectLst>
+              <a:hlinkClick r:id="rId3"/>
+            </a:endParaRPr>
+          </a:p>
+          <a:p>
+            <a:pPr marL="400050" lvl="1" indent="0" algn="r">
+              <a:buNone/>
+            </a:pPr>
+            <a:endParaRPr lang="en-US" sz="10600" b="1" i="1" dirty="0">
+              <a:effectLst>
+                <a:outerShdw blurRad="38100" dist="38100" dir="2700000" algn="tl">
+                  <a:srgbClr val="000000">
+                    <a:alpha val="43137"/>
+                  </a:srgbClr>
+                </a:outerShdw>
+              </a:effectLst>
+              <a:hlinkClick r:id="rId3"/>
+            </a:endParaRPr>
+          </a:p>
+          <a:p>
+            <a:pPr marL="400050" lvl="1" indent="0" algn="r">
+              <a:buNone/>
+            </a:pPr>
+            <a:endParaRPr lang="en-US" sz="2000" dirty="0"/>
+          </a:p>
+        </p:txBody>
+      </p:sp>
+    </p:spTree>
+    <p:extLst>
+      <p:ext uri="{BB962C8B-B14F-4D97-AF65-F5344CB8AC3E}">
+        <p14:creationId xmlns:p14="http://schemas.microsoft.com/office/powerpoint/2010/main" val="2397691916"/>
+      </p:ext>
+    </p:extLst>
+  </p:cSld>
+  <p:clrMapOvr>
+    <a:masterClrMapping/>
+  </p:clrMapOvr>
+  <p:timing>
+    <p:tnLst>
+      <p:par>
+        <p:cTn id="1" dur="indefinite" restart="never" nodeType="tmRoot"/>
+      </p:par>
+    </p:tnLst>
+  </p:timing>
+</p:sld>
+</file>
+
+<file path=ppt/slides/slide7.xml><?xml version="1.0" encoding="utf-8"?>
+<p:sld xmlns:a="http://schemas.openxmlformats.org/drawingml/2006/main" xmlns:r="http://schemas.openxmlformats.org/officeDocument/2006/relationships" xmlns:p="http://schemas.openxmlformats.org/presentationml/2006/main">
+  <p:cSld>
+    <p:spTree>
+      <p:nvGrpSpPr>
+        <p:cNvPr id="1" name=""/>
+        <p:cNvGrpSpPr/>
+        <p:nvPr/>
+      </p:nvGrpSpPr>
+      <p:grpSpPr>
+        <a:xfrm>
+          <a:off x="0" y="0"/>
+          <a:ext cx="0" cy="0"/>
+          <a:chOff x="0" y="0"/>
+          <a:chExt cx="0" cy="0"/>
+        </a:xfrm>
+      </p:grpSpPr>
+      <p:sp>
+        <p:nvSpPr>
+          <p:cNvPr id="2" name="Title 1"/>
+          <p:cNvSpPr>
+            <a:spLocks noGrp="1"/>
+          </p:cNvSpPr>
+          <p:nvPr>
+            <p:ph type="title"/>
+          </p:nvPr>
+        </p:nvSpPr>
+        <p:spPr>
+          <a:xfrm>
+            <a:off x="2250829" y="8440"/>
+            <a:ext cx="9404723" cy="784040"/>
+          </a:xfrm>
+        </p:spPr>
+        <p:txBody>
+          <a:bodyPr/>
+          <a:lstStyle/>
+          <a:p>
+            <a:r>
+              <a:rPr lang="en-US" sz="3200" b="1" i="1" u="sng" dirty="0" smtClean="0">
+                <a:solidFill>
+                  <a:schemeClr val="accent1">
+                    <a:lumMod val="40000"/>
+                    <a:lumOff val="60000"/>
+                  </a:schemeClr>
+                </a:solidFill>
+                <a:effectLst>
+                  <a:outerShdw blurRad="38100" dist="38100" dir="2700000" algn="tl">
+                    <a:srgbClr val="000000">
+                      <a:alpha val="43137"/>
+                    </a:srgbClr>
+                  </a:outerShdw>
+                </a:effectLst>
+              </a:rPr>
+              <a:t>MY WEBSITE ACCESS AND FEEDBACK</a:t>
+            </a:r>
+            <a:endParaRPr lang="en-US" sz="3200" b="1" i="1" u="sng" dirty="0">
+              <a:solidFill>
+                <a:schemeClr val="accent1">
+                  <a:lumMod val="40000"/>
+                  <a:lumOff val="60000"/>
+                </a:schemeClr>
+              </a:solidFill>
+              <a:effectLst>
+                <a:outerShdw blurRad="38100" dist="38100" dir="2700000" algn="tl">
+                  <a:srgbClr val="000000">
+                    <a:alpha val="43137"/>
+                  </a:srgbClr>
+                </a:outerShdw>
+              </a:effectLst>
+            </a:endParaRPr>
+          </a:p>
+        </p:txBody>
+      </p:sp>
+      <p:sp>
+        <p:nvSpPr>
+          <p:cNvPr id="3" name="Content Placeholder 2"/>
+          <p:cNvSpPr>
+            <a:spLocks noGrp="1"/>
+          </p:cNvSpPr>
+          <p:nvPr>
+            <p:ph idx="1"/>
+          </p:nvPr>
+        </p:nvSpPr>
+        <p:spPr>
+          <a:xfrm>
+            <a:off x="188976" y="792480"/>
+            <a:ext cx="11814048" cy="5803392"/>
+          </a:xfrm>
+        </p:spPr>
+        <p:txBody>
+          <a:bodyPr>
+            <a:normAutofit fontScale="92500"/>
+          </a:bodyPr>
+          <a:lstStyle/>
           <a:p>
             <a:pPr marL="0" indent="0">
               <a:buNone/>
             </a:pPr>
-            <a:endParaRPr lang="en-US" sz="4400" dirty="0"/>
+            <a:r>
+              <a:rPr lang="en-US" sz="1400" dirty="0"/>
+              <a:t>						</a:t>
+            </a:r>
+            <a:endParaRPr lang="en-US" sz="1400" dirty="0" smtClean="0"/>
           </a:p>
           <a:p>
             <a:pPr marL="0" indent="0">
               <a:buNone/>
             </a:pPr>
             <a:r>
-              <a:rPr lang="en-US" sz="4400" dirty="0" smtClean="0"/>
-              <a:t>							</a:t>
-            </a:r>
-          </a:p>
-          <a:p>
-            <a:pPr marL="0" indent="0">
-              <a:buNone/>
-            </a:pPr>
-            <a:r>
-              <a:rPr lang="en-US" sz="4400" dirty="0"/>
-              <a:t>	</a:t>
-            </a:r>
-            <a:r>
-              <a:rPr lang="en-US" sz="4400" dirty="0" smtClean="0"/>
-              <a:t>					</a:t>
-            </a:r>
-            <a:r>
-              <a:rPr lang="en-US" sz="5800" b="1" dirty="0" smtClean="0"/>
-              <a:t>SCAN </a:t>
-            </a:r>
-            <a:r>
-              <a:rPr lang="en-US" sz="5800" b="1" dirty="0"/>
-              <a:t>THE ABOVE </a:t>
-            </a:r>
-            <a:r>
-              <a:rPr lang="en-US" sz="5800" b="1" dirty="0" smtClean="0"/>
-              <a:t>👆 </a:t>
-            </a:r>
-            <a:r>
-              <a:rPr lang="en-US" sz="5800" b="1" dirty="0" smtClean="0"/>
-              <a:t>QR CODE (ON </a:t>
-            </a:r>
-            <a:r>
-              <a:rPr lang="en-US" sz="5800" b="1" dirty="0">
+              <a:rPr lang="en-US" sz="2800" b="1" dirty="0" smtClean="0"/>
+              <a:t>               SCAN THE ABOVE 👆 QR CODE (ON </a:t>
+            </a:r>
+            <a:r>
+              <a:rPr lang="en-US" sz="2800" b="1" dirty="0" smtClean="0">
                 <a:solidFill>
                   <a:schemeClr val="accent1">
                     <a:lumMod val="40000"/>
@@ -7310,48 +7433,164 @@
               <a:t>PAGE3</a:t>
             </a:r>
             <a:r>
-              <a:rPr lang="en-US" sz="5800" b="1" dirty="0"/>
-              <a:t>) </a:t>
-            </a:r>
-            <a:r>
-              <a:rPr lang="en-US" sz="5800" b="1" dirty="0" smtClean="0"/>
-              <a:t>👆</a:t>
-            </a:r>
-            <a:endParaRPr lang="en-US" sz="5800" b="1" dirty="0" smtClean="0"/>
+              <a:rPr lang="en-US" sz="2800" b="1" dirty="0" smtClean="0"/>
+              <a:t>) 👆</a:t>
+            </a:r>
           </a:p>
           <a:p>
             <a:pPr marL="0" indent="0">
               <a:buNone/>
             </a:pPr>
             <a:r>
-              <a:rPr lang="en-US" sz="4400" dirty="0" smtClean="0"/>
-              <a:t>									</a:t>
-            </a:r>
+              <a:rPr lang="en-US" dirty="0"/>
+              <a:t>												</a:t>
+            </a:r>
+            <a:r>
+              <a:rPr lang="en-US" sz="5400" b="1" dirty="0"/>
+              <a:t>OR</a:t>
+            </a:r>
+            <a:endParaRPr lang="en-US" b="1" dirty="0"/>
+          </a:p>
+          <a:p>
+            <a:endParaRPr lang="en-US" dirty="0" smtClean="0"/>
+          </a:p>
+          <a:p>
+            <a:pPr marL="3657600" lvl="8" indent="0">
+              <a:buNone/>
+            </a:pPr>
+            <a:endParaRPr lang="en-US" dirty="0" smtClean="0"/>
+          </a:p>
+          <a:p>
+            <a:pPr marL="3657600" lvl="8" indent="0">
+              <a:buNone/>
+            </a:pPr>
+            <a:endParaRPr lang="en-US" sz="4400" b="1" i="1" u="sng" dirty="0">
+              <a:solidFill>
+                <a:schemeClr val="accent1">
+                  <a:lumMod val="40000"/>
+                  <a:lumOff val="60000"/>
+                </a:schemeClr>
+              </a:solidFill>
+              <a:effectLst>
+                <a:outerShdw blurRad="38100" dist="38100" dir="2700000" algn="tl">
+                  <a:srgbClr val="000000">
+                    <a:alpha val="43137"/>
+                  </a:srgbClr>
+                </a:outerShdw>
+              </a:effectLst>
+            </a:endParaRPr>
+          </a:p>
+          <a:p>
+            <a:pPr marL="3657600" lvl="8" indent="0">
+              <a:buNone/>
+            </a:pPr>
+            <a:r>
+              <a:rPr lang="en-US" sz="4400" b="1" i="1" u="sng" dirty="0" smtClean="0">
+                <a:solidFill>
+                  <a:schemeClr val="accent1">
+                    <a:lumMod val="40000"/>
+                    <a:lumOff val="60000"/>
+                  </a:schemeClr>
+                </a:solidFill>
+                <a:effectLst>
+                  <a:outerShdw blurRad="38100" dist="38100" dir="2700000" algn="tl">
+                    <a:srgbClr val="000000">
+                      <a:alpha val="43137"/>
+                    </a:srgbClr>
+                  </a:outerShdw>
+                </a:effectLst>
+              </a:rPr>
+              <a:t>👇YOUR FEEDBACK MATTERS👇</a:t>
+            </a:r>
+            <a:endParaRPr lang="en-US" sz="4400" b="1" i="1" u="sng" dirty="0">
+              <a:solidFill>
+                <a:schemeClr val="accent1">
+                  <a:lumMod val="40000"/>
+                  <a:lumOff val="60000"/>
+                </a:schemeClr>
+              </a:solidFill>
+              <a:effectLst>
+                <a:outerShdw blurRad="38100" dist="38100" dir="2700000" algn="tl">
+                  <a:srgbClr val="000000">
+                    <a:alpha val="43137"/>
+                  </a:srgbClr>
+                </a:outerShdw>
+              </a:effectLst>
+            </a:endParaRPr>
+          </a:p>
+          <a:p>
+            <a:endParaRPr lang="en-US" dirty="0" smtClean="0"/>
           </a:p>
           <a:p>
             <a:pPr marL="0" indent="0">
               <a:buNone/>
             </a:pPr>
             <a:r>
-              <a:rPr lang="en-US" sz="4400" dirty="0"/>
-              <a:t>	</a:t>
-            </a:r>
-            <a:r>
-              <a:rPr lang="en-US" sz="4400" dirty="0" smtClean="0"/>
-              <a:t>											</a:t>
-            </a:r>
-            <a:r>
-              <a:rPr lang="en-US" sz="9300" b="1" dirty="0" smtClean="0"/>
-              <a:t>OR</a:t>
-            </a:r>
-            <a:endParaRPr lang="en-US" sz="4400" b="1" dirty="0" smtClean="0"/>
-          </a:p>
+              <a:rPr lang="en-US" sz="7200" b="1" i="1" dirty="0" smtClean="0">
+                <a:hlinkClick r:id="rId2"/>
+              </a:rPr>
+              <a:t>CLICK HERE</a:t>
+            </a:r>
+            <a:r>
+              <a:rPr lang="en-US" sz="4000" dirty="0" smtClean="0">
+                <a:hlinkClick r:id="rId2"/>
+              </a:rPr>
+              <a:t> </a:t>
+            </a:r>
+            <a:r>
+              <a:rPr lang="en-US" sz="2400" dirty="0" smtClean="0">
+                <a:solidFill>
+                  <a:schemeClr val="accent2"/>
+                </a:solidFill>
+                <a:hlinkClick r:id="rId2"/>
+              </a:rPr>
+              <a:t>TO GIVE YOUR FEEDBACK</a:t>
+            </a:r>
+            <a:r>
+              <a:rPr lang="en-US" sz="2400" dirty="0" smtClean="0">
+                <a:solidFill>
+                  <a:schemeClr val="accent2"/>
+                </a:solidFill>
+              </a:rPr>
+              <a:t> </a:t>
+            </a:r>
+            <a:endParaRPr lang="en-US" sz="4000" dirty="0">
+              <a:solidFill>
+                <a:schemeClr val="accent2"/>
+              </a:solidFill>
+            </a:endParaRPr>
+          </a:p>
+          <a:p>
+            <a:endParaRPr lang="en-US" dirty="0"/>
+          </a:p>
+        </p:txBody>
+      </p:sp>
+      <p:sp>
+        <p:nvSpPr>
+          <p:cNvPr id="4" name="Rectangle 3"/>
+          <p:cNvSpPr/>
+          <p:nvPr/>
+        </p:nvSpPr>
+        <p:spPr>
+          <a:xfrm>
+            <a:off x="-1028883" y="2373451"/>
+            <a:ext cx="11814048" cy="1200329"/>
+          </a:xfrm>
+          <a:prstGeom prst="rect">
+            <a:avLst/>
+          </a:prstGeom>
+        </p:spPr>
+        <p:txBody>
+          <a:bodyPr wrap="square">
+            <a:spAutoFit/>
+          </a:bodyPr>
+          <a:lstStyle/>
           <a:p>
             <a:pPr marL="400050" lvl="1" indent="0" algn="r">
               <a:buNone/>
             </a:pPr>
             <a:r>
-              <a:rPr lang="en-US" sz="16600" b="1" i="1" dirty="0" smtClean="0">
+              <a:rPr lang="en-US" sz="7200" b="1" i="1" dirty="0">
                 <a:solidFill>
                   <a:schemeClr val="accent2"/>
                 </a:solidFill>
@@ -7364,26 +7603,10 @@
                 </a:effectLst>
                 <a:hlinkClick r:id="rId3"/>
               </a:rPr>
-              <a:t>CLICK </a:t>
-            </a:r>
-            <a:r>
-              <a:rPr lang="en-US" sz="16600" b="1" i="1" dirty="0" smtClean="0">
-                <a:solidFill>
-                  <a:schemeClr val="accent2"/>
-                </a:solidFill>
-                <a:effectLst>
-                  <a:outerShdw blurRad="38100" dist="38100" dir="2700000" algn="tl">
-                    <a:srgbClr val="000000">
-                      <a:alpha val="43137"/>
-                    </a:srgbClr>
-                  </a:outerShdw>
-                </a:effectLst>
-                <a:hlinkClick r:id="rId3"/>
-              </a:rPr>
-              <a:t>HERE</a:t>
-            </a:r>
-            <a:r>
-              <a:rPr lang="en-US" sz="16600" i="1" dirty="0" smtClean="0">
+              <a:t>CLICK HERE</a:t>
+            </a:r>
+            <a:r>
+              <a:rPr lang="en-US" sz="7200" i="1" dirty="0">
                 <a:solidFill>
                   <a:schemeClr val="accent2"/>
                 </a:solidFill>
@@ -7399,7 +7622,7 @@
               <a:t> </a:t>
             </a:r>
             <a:r>
-              <a:rPr lang="en-US" sz="4200" i="1" dirty="0" smtClean="0">
+              <a:rPr lang="en-US" sz="2000" i="1" dirty="0">
                 <a:solidFill>
                   <a:schemeClr val="accent2"/>
                 </a:solidFill>
@@ -7412,99 +7635,15 @@
                 </a:effectLst>
                 <a:hlinkClick r:id="rId3"/>
               </a:rPr>
-              <a:t>TO VISIT MY LIFE </a:t>
-            </a:r>
-            <a:r>
-              <a:rPr lang="en-US" sz="4200" i="1" dirty="0" smtClean="0">
-                <a:solidFill>
-                  <a:schemeClr val="accent2"/>
-                </a:solidFill>
-                <a:effectLst>
-                  <a:outerShdw blurRad="38100" dist="38100" dir="2700000" algn="tl">
-                    <a:srgbClr val="000000">
-                      <a:alpha val="43137"/>
-                    </a:srgbClr>
-                  </a:outerShdw>
-                </a:effectLst>
-                <a:hlinkClick r:id="rId3"/>
-              </a:rPr>
-              <a:t>STORY </a:t>
-            </a:r>
-            <a:r>
-              <a:rPr lang="en-US" sz="4200" i="1" dirty="0" smtClean="0">
-                <a:solidFill>
-                  <a:schemeClr val="accent2"/>
-                </a:solidFill>
-                <a:effectLst>
-                  <a:outerShdw blurRad="38100" dist="38100" dir="2700000" algn="tl">
-                    <a:srgbClr val="000000">
-                      <a:alpha val="43137"/>
-                    </a:srgbClr>
-                  </a:outerShdw>
-                </a:effectLst>
-                <a:hlinkClick r:id="rId3"/>
-              </a:rPr>
-              <a:t>SAMPLE</a:t>
-            </a:r>
-            <a:r>
-              <a:rPr lang="en-US" sz="4200" i="1" dirty="0" smtClean="0">
-                <a:solidFill>
-                  <a:schemeClr val="accent2"/>
-                </a:solidFill>
-                <a:effectLst>
-                  <a:outerShdw blurRad="38100" dist="38100" dir="2700000" algn="tl">
-                    <a:srgbClr val="000000">
-                      <a:alpha val="43137"/>
-                    </a:srgbClr>
-                  </a:outerShdw>
-                </a:effectLst>
-                <a:hlinkClick r:id="rId3"/>
-              </a:rPr>
-              <a:t> WEBSITE</a:t>
-            </a:r>
-          </a:p>
-          <a:p>
-            <a:pPr marL="400050" lvl="1" indent="0" algn="r">
-              <a:buNone/>
-            </a:pPr>
-            <a:endParaRPr lang="en-US" sz="10600" b="1" i="1" dirty="0" smtClean="0">
-              <a:effectLst>
-                <a:outerShdw blurRad="38100" dist="38100" dir="2700000" algn="tl">
-                  <a:srgbClr val="000000">
-                    <a:alpha val="43137"/>
-                  </a:srgbClr>
-                </a:outerShdw>
-              </a:effectLst>
-              <a:hlinkClick r:id="rId3"/>
-            </a:endParaRPr>
-          </a:p>
-          <a:p>
-            <a:pPr marL="400050" lvl="1" indent="0" algn="r">
-              <a:buNone/>
-            </a:pPr>
-            <a:endParaRPr lang="en-US" sz="10600" b="1" i="1" dirty="0">
-              <a:effectLst>
-                <a:outerShdw blurRad="38100" dist="38100" dir="2700000" algn="tl">
-                  <a:srgbClr val="000000">
-                    <a:alpha val="43137"/>
-                  </a:srgbClr>
-                </a:outerShdw>
-              </a:effectLst>
-              <a:hlinkClick r:id="rId3"/>
-            </a:endParaRPr>
-          </a:p>
-          <a:p>
-            <a:pPr marL="400050" lvl="1" indent="0" algn="r">
-              <a:buNone/>
-            </a:pPr>
-            <a:endParaRPr lang="en-US" sz="2000" dirty="0"/>
+              <a:t>TO VISIT MY LIFE STORY SAMPLE WEBSITE</a:t>
+            </a:r>
           </a:p>
         </p:txBody>
       </p:sp>
     </p:spTree>
     <p:extLst>
       <p:ext uri="{BB962C8B-B14F-4D97-AF65-F5344CB8AC3E}">
-        <p14:creationId xmlns:p14="http://schemas.microsoft.com/office/powerpoint/2010/main" val="2397691916"/>
+        <p14:creationId xmlns:p14="http://schemas.microsoft.com/office/powerpoint/2010/main" val="113666274"/>
       </p:ext>
     </p:extLst>
   </p:cSld>
